--- a/public/cours/vtc/F_Locale_2.pptx
+++ b/public/cours/vtc/F_Locale_2.pptx
@@ -123,197 +123,6 @@
     </p:ext>
   </p:extLst>
 </p:presentation>
-</file>
-
-<file path=ppt/revisionInfo.xml><?xml version="1.0" encoding="utf-8"?>
-<p1510:revInfo xmlns:a="http://schemas.openxmlformats.org/drawingml/2006/main" xmlns:r="http://schemas.openxmlformats.org/officeDocument/2006/relationships" xmlns:p1510="http://schemas.microsoft.com/office/powerpoint/2015/10/main">
-  <p1510:revLst>
-    <p1510:client id="{522D2C08-D73C-42D8-A573-76CD642E5A69}" v="2" dt="2026-05-05T16:25:10.200"/>
-  </p1510:revLst>
-</p1510:revInfo>
-</file>
-
-<file path=ppt/changesInfos/changesInfo1.xml><?xml version="1.0" encoding="utf-8"?>
-<pc:chgInfo xmlns:a="http://schemas.openxmlformats.org/drawingml/2006/main" xmlns:r="http://schemas.openxmlformats.org/officeDocument/2006/relationships" xmlns:ac="http://schemas.microsoft.com/office/drawing/2013/main/command" xmlns:pc="http://schemas.microsoft.com/office/powerpoint/2013/main/command">
-  <pc:docChgLst>
-    <pc:chgData name="naoufal guenichi" userId="858fd4b3-0f44-4d07-ab42-9c2b2bf873b3" providerId="ADAL" clId="{F93C6F2D-346B-4B0C-B880-14B939F4D1D8}"/>
-    <pc:docChg chg="undo custSel modSld">
-      <pc:chgData name="naoufal guenichi" userId="858fd4b3-0f44-4d07-ab42-9c2b2bf873b3" providerId="ADAL" clId="{F93C6F2D-346B-4B0C-B880-14B939F4D1D8}" dt="2026-05-05T16:25:10.200" v="79"/>
-      <pc:docMkLst>
-        <pc:docMk/>
-      </pc:docMkLst>
-      <pc:sldChg chg="modSp mod">
-        <pc:chgData name="naoufal guenichi" userId="858fd4b3-0f44-4d07-ab42-9c2b2bf873b3" providerId="ADAL" clId="{F93C6F2D-346B-4B0C-B880-14B939F4D1D8}" dt="2026-05-05T16:15:06.450" v="57" actId="14100"/>
-        <pc:sldMkLst>
-          <pc:docMk/>
-          <pc:sldMk cId="0" sldId="258"/>
-        </pc:sldMkLst>
-        <pc:spChg chg="mod">
-          <ac:chgData name="naoufal guenichi" userId="858fd4b3-0f44-4d07-ab42-9c2b2bf873b3" providerId="ADAL" clId="{F93C6F2D-346B-4B0C-B880-14B939F4D1D8}" dt="2026-05-05T16:15:06.450" v="57" actId="14100"/>
-          <ac:spMkLst>
-            <pc:docMk/>
-            <pc:sldMk cId="0" sldId="258"/>
-            <ac:spMk id="11" creationId="{00000000-0000-0000-0000-000000000000}"/>
-          </ac:spMkLst>
-        </pc:spChg>
-      </pc:sldChg>
-      <pc:sldChg chg="modSp mod">
-        <pc:chgData name="naoufal guenichi" userId="858fd4b3-0f44-4d07-ab42-9c2b2bf873b3" providerId="ADAL" clId="{F93C6F2D-346B-4B0C-B880-14B939F4D1D8}" dt="2026-05-05T16:15:22.579" v="64" actId="20577"/>
-        <pc:sldMkLst>
-          <pc:docMk/>
-          <pc:sldMk cId="0" sldId="260"/>
-        </pc:sldMkLst>
-        <pc:spChg chg="mod">
-          <ac:chgData name="naoufal guenichi" userId="858fd4b3-0f44-4d07-ab42-9c2b2bf873b3" providerId="ADAL" clId="{F93C6F2D-346B-4B0C-B880-14B939F4D1D8}" dt="2026-05-05T16:15:22.579" v="64" actId="20577"/>
-          <ac:spMkLst>
-            <pc:docMk/>
-            <pc:sldMk cId="0" sldId="260"/>
-            <ac:spMk id="8" creationId="{00000000-0000-0000-0000-000000000000}"/>
-          </ac:spMkLst>
-        </pc:spChg>
-      </pc:sldChg>
-      <pc:sldChg chg="modSp mod">
-        <pc:chgData name="naoufal guenichi" userId="858fd4b3-0f44-4d07-ab42-9c2b2bf873b3" providerId="ADAL" clId="{F93C6F2D-346B-4B0C-B880-14B939F4D1D8}" dt="2026-05-05T16:16:14.196" v="65" actId="14100"/>
-        <pc:sldMkLst>
-          <pc:docMk/>
-          <pc:sldMk cId="0" sldId="263"/>
-        </pc:sldMkLst>
-        <pc:spChg chg="mod">
-          <ac:chgData name="naoufal guenichi" userId="858fd4b3-0f44-4d07-ab42-9c2b2bf873b3" providerId="ADAL" clId="{F93C6F2D-346B-4B0C-B880-14B939F4D1D8}" dt="2026-05-05T16:16:14.196" v="65" actId="14100"/>
-          <ac:spMkLst>
-            <pc:docMk/>
-            <pc:sldMk cId="0" sldId="263"/>
-            <ac:spMk id="13" creationId="{00000000-0000-0000-0000-000000000000}"/>
-          </ac:spMkLst>
-        </pc:spChg>
-        <pc:spChg chg="mod">
-          <ac:chgData name="naoufal guenichi" userId="858fd4b3-0f44-4d07-ab42-9c2b2bf873b3" providerId="ADAL" clId="{F93C6F2D-346B-4B0C-B880-14B939F4D1D8}" dt="2026-05-05T16:12:10.061" v="0" actId="20577"/>
-          <ac:spMkLst>
-            <pc:docMk/>
-            <pc:sldMk cId="0" sldId="263"/>
-            <ac:spMk id="16" creationId="{00000000-0000-0000-0000-000000000000}"/>
-          </ac:spMkLst>
-        </pc:spChg>
-      </pc:sldChg>
-      <pc:sldChg chg="delSp modSp mod">
-        <pc:chgData name="naoufal guenichi" userId="858fd4b3-0f44-4d07-ab42-9c2b2bf873b3" providerId="ADAL" clId="{F93C6F2D-346B-4B0C-B880-14B939F4D1D8}" dt="2026-05-05T16:16:43.647" v="69" actId="478"/>
-        <pc:sldMkLst>
-          <pc:docMk/>
-          <pc:sldMk cId="0" sldId="264"/>
-        </pc:sldMkLst>
-        <pc:spChg chg="mod">
-          <ac:chgData name="naoufal guenichi" userId="858fd4b3-0f44-4d07-ab42-9c2b2bf873b3" providerId="ADAL" clId="{F93C6F2D-346B-4B0C-B880-14B939F4D1D8}" dt="2026-05-05T16:16:41.426" v="68" actId="1076"/>
-          <ac:spMkLst>
-            <pc:docMk/>
-            <pc:sldMk cId="0" sldId="264"/>
-            <ac:spMk id="5" creationId="{00000000-0000-0000-0000-000000000000}"/>
-          </ac:spMkLst>
-        </pc:spChg>
-        <pc:spChg chg="del">
-          <ac:chgData name="naoufal guenichi" userId="858fd4b3-0f44-4d07-ab42-9c2b2bf873b3" providerId="ADAL" clId="{F93C6F2D-346B-4B0C-B880-14B939F4D1D8}" dt="2026-05-05T16:16:36.058" v="66" actId="478"/>
-          <ac:spMkLst>
-            <pc:docMk/>
-            <pc:sldMk cId="0" sldId="264"/>
-            <ac:spMk id="17" creationId="{00000000-0000-0000-0000-000000000000}"/>
-          </ac:spMkLst>
-        </pc:spChg>
-        <pc:spChg chg="del">
-          <ac:chgData name="naoufal guenichi" userId="858fd4b3-0f44-4d07-ab42-9c2b2bf873b3" providerId="ADAL" clId="{F93C6F2D-346B-4B0C-B880-14B939F4D1D8}" dt="2026-05-05T16:16:43.647" v="69" actId="478"/>
-          <ac:spMkLst>
-            <pc:docMk/>
-            <pc:sldMk cId="0" sldId="264"/>
-            <ac:spMk id="18" creationId="{00000000-0000-0000-0000-000000000000}"/>
-          </ac:spMkLst>
-        </pc:spChg>
-        <pc:spChg chg="mod">
-          <ac:chgData name="naoufal guenichi" userId="858fd4b3-0f44-4d07-ab42-9c2b2bf873b3" providerId="ADAL" clId="{F93C6F2D-346B-4B0C-B880-14B939F4D1D8}" dt="2026-05-05T16:16:40.088" v="67" actId="20577"/>
-          <ac:spMkLst>
-            <pc:docMk/>
-            <pc:sldMk cId="0" sldId="264"/>
-            <ac:spMk id="19" creationId="{00000000-0000-0000-0000-000000000000}"/>
-          </ac:spMkLst>
-        </pc:spChg>
-      </pc:sldChg>
-      <pc:sldChg chg="modSp mod">
-        <pc:chgData name="naoufal guenichi" userId="858fd4b3-0f44-4d07-ab42-9c2b2bf873b3" providerId="ADAL" clId="{F93C6F2D-346B-4B0C-B880-14B939F4D1D8}" dt="2026-05-05T16:14:51.539" v="55" actId="1076"/>
-        <pc:sldMkLst>
-          <pc:docMk/>
-          <pc:sldMk cId="0" sldId="265"/>
-        </pc:sldMkLst>
-        <pc:spChg chg="mod">
-          <ac:chgData name="naoufal guenichi" userId="858fd4b3-0f44-4d07-ab42-9c2b2bf873b3" providerId="ADAL" clId="{F93C6F2D-346B-4B0C-B880-14B939F4D1D8}" dt="2026-05-05T16:14:51.539" v="55" actId="1076"/>
-          <ac:spMkLst>
-            <pc:docMk/>
-            <pc:sldMk cId="0" sldId="265"/>
-            <ac:spMk id="2" creationId="{00000000-0000-0000-0000-000000000000}"/>
-          </ac:spMkLst>
-        </pc:spChg>
-        <pc:spChg chg="mod">
-          <ac:chgData name="naoufal guenichi" userId="858fd4b3-0f44-4d07-ab42-9c2b2bf873b3" providerId="ADAL" clId="{F93C6F2D-346B-4B0C-B880-14B939F4D1D8}" dt="2026-05-05T16:14:17.742" v="46" actId="20577"/>
-          <ac:spMkLst>
-            <pc:docMk/>
-            <pc:sldMk cId="0" sldId="265"/>
-            <ac:spMk id="22" creationId="{00000000-0000-0000-0000-000000000000}"/>
-          </ac:spMkLst>
-        </pc:spChg>
-      </pc:sldChg>
-      <pc:sldChg chg="modSp mod">
-        <pc:chgData name="naoufal guenichi" userId="858fd4b3-0f44-4d07-ab42-9c2b2bf873b3" providerId="ADAL" clId="{F93C6F2D-346B-4B0C-B880-14B939F4D1D8}" dt="2026-05-05T16:16:56.337" v="70" actId="20577"/>
-        <pc:sldMkLst>
-          <pc:docMk/>
-          <pc:sldMk cId="0" sldId="266"/>
-        </pc:sldMkLst>
-        <pc:spChg chg="mod">
-          <ac:chgData name="naoufal guenichi" userId="858fd4b3-0f44-4d07-ab42-9c2b2bf873b3" providerId="ADAL" clId="{F93C6F2D-346B-4B0C-B880-14B939F4D1D8}" dt="2026-05-05T16:13:43.468" v="43" actId="20577"/>
-          <ac:spMkLst>
-            <pc:docMk/>
-            <pc:sldMk cId="0" sldId="266"/>
-            <ac:spMk id="13" creationId="{00000000-0000-0000-0000-000000000000}"/>
-          </ac:spMkLst>
-        </pc:spChg>
-        <pc:spChg chg="mod">
-          <ac:chgData name="naoufal guenichi" userId="858fd4b3-0f44-4d07-ab42-9c2b2bf873b3" providerId="ADAL" clId="{F93C6F2D-346B-4B0C-B880-14B939F4D1D8}" dt="2026-05-05T16:16:56.337" v="70" actId="20577"/>
-          <ac:spMkLst>
-            <pc:docMk/>
-            <pc:sldMk cId="0" sldId="266"/>
-            <ac:spMk id="18" creationId="{00000000-0000-0000-0000-000000000000}"/>
-          </ac:spMkLst>
-        </pc:spChg>
-      </pc:sldChg>
-      <pc:sldChg chg="modSp mod">
-        <pc:chgData name="naoufal guenichi" userId="858fd4b3-0f44-4d07-ab42-9c2b2bf873b3" providerId="ADAL" clId="{F93C6F2D-346B-4B0C-B880-14B939F4D1D8}" dt="2026-05-05T16:25:10.200" v="79"/>
-        <pc:sldMkLst>
-          <pc:docMk/>
-          <pc:sldMk cId="0" sldId="268"/>
-        </pc:sldMkLst>
-        <pc:spChg chg="mod">
-          <ac:chgData name="naoufal guenichi" userId="858fd4b3-0f44-4d07-ab42-9c2b2bf873b3" providerId="ADAL" clId="{F93C6F2D-346B-4B0C-B880-14B939F4D1D8}" dt="2026-05-05T16:19:50.081" v="76" actId="20577"/>
-          <ac:spMkLst>
-            <pc:docMk/>
-            <pc:sldMk cId="0" sldId="268"/>
-            <ac:spMk id="13" creationId="{00000000-0000-0000-0000-000000000000}"/>
-          </ac:spMkLst>
-        </pc:spChg>
-        <pc:spChg chg="mod">
-          <ac:chgData name="naoufal guenichi" userId="858fd4b3-0f44-4d07-ab42-9c2b2bf873b3" providerId="ADAL" clId="{F93C6F2D-346B-4B0C-B880-14B939F4D1D8}" dt="2026-05-05T16:17:32.563" v="73" actId="20577"/>
-          <ac:spMkLst>
-            <pc:docMk/>
-            <pc:sldMk cId="0" sldId="268"/>
-            <ac:spMk id="25" creationId="{00000000-0000-0000-0000-000000000000}"/>
-          </ac:spMkLst>
-        </pc:spChg>
-        <pc:spChg chg="mod">
-          <ac:chgData name="naoufal guenichi" userId="858fd4b3-0f44-4d07-ab42-9c2b2bf873b3" providerId="ADAL" clId="{F93C6F2D-346B-4B0C-B880-14B939F4D1D8}" dt="2026-05-05T16:25:10.200" v="79"/>
-          <ac:spMkLst>
-            <pc:docMk/>
-            <pc:sldMk cId="0" sldId="268"/>
-            <ac:spMk id="28" creationId="{00000000-0000-0000-0000-000000000000}"/>
-          </ac:spMkLst>
-        </pc:spChg>
-      </pc:sldChg>
-    </pc:docChg>
-  </pc:docChgLst>
-</pc:chgInfo>
 </file>
 
 <file path=ppt/notesMasters/notesMaster1.xml><?xml version="1.0" encoding="utf-8"?>
@@ -1935,7 +1744,7 @@
     <p:bg>
       <p:bgPr>
         <a:solidFill>
-          <a:srgbClr val="F2F2F2"/>
+          <a:srgbClr val="1E2A3A"/>
         </a:solidFill>
         <a:effectLst/>
       </p:bgPr>
@@ -1969,7 +1778,7 @@
             <a:avLst/>
           </a:prstGeom>
           <a:solidFill>
-            <a:srgbClr val="E8E8E8"/>
+            <a:srgbClr val="D4A843"/>
           </a:solidFill>
           <a:ln/>
         </p:spPr>
@@ -2008,7 +1817,7 @@
             <a:r>
               <a:rPr lang="en-US" sz="1400" b="1" kern="0" spc="400" dirty="0">
                 <a:solidFill>
-                  <a:srgbClr val="1A202C"/>
+                  <a:srgbClr val="D4A843"/>
                 </a:solidFill>
                 <a:latin typeface="Calibri" pitchFamily="34" charset="0"/>
                 <a:ea typeface="Calibri" pitchFamily="34" charset="-122"/>
@@ -2047,7 +1856,7 @@
             <a:r>
               <a:rPr lang="en-US" sz="4400" b="1" dirty="0">
                 <a:solidFill>
-                  <a:srgbClr val="1A202C"/>
+                  <a:srgbClr val="FFFFFF"/>
                 </a:solidFill>
                 <a:latin typeface="Georgia" pitchFamily="34" charset="0"/>
                 <a:ea typeface="Georgia" pitchFamily="34" charset="-122"/>
@@ -2092,7 +1901,7 @@
                 <a:ea typeface="Calibri" pitchFamily="34" charset="-122"/>
                 <a:cs typeface="Calibri" pitchFamily="34" charset="-120"/>
               </a:rPr>
-              <a:t>Taximètre hors ZUPC · Affichette · Notes · Mise à jour tarifaire · IMC · ADS · Permis de circuler · Obligations conducteur · Véhicule · Remplacement · Listes d'attente · Droits de stationnement</a:t>
+              <a:t>Taximètre hors ZUPC · Affichette · Notes · Mise à jour tarifaire · IMC · ADS · Justificatif d'exploitation · Obligations conducteur · Véhicule · Remplacement · Listes d'attente · Droits de stationnement</a:t>
             </a:r>
             <a:endParaRPr lang="en-US" sz="950" dirty="0"/>
           </a:p>
@@ -2125,7 +1934,7 @@
             <a:r>
               <a:rPr lang="en-US" sz="900" b="1" kern="0" spc="200" dirty="0">
                 <a:solidFill>
-                  <a:srgbClr val="1A202C"/>
+                  <a:srgbClr val="D4A843"/>
                 </a:solidFill>
                 <a:latin typeface="Calibri" pitchFamily="34" charset="0"/>
                 <a:ea typeface="Calibri" pitchFamily="34" charset="-122"/>
@@ -2168,7 +1977,7 @@
             <a:r>
               <a:rPr lang="en-US" sz="800" dirty="0">
                 <a:solidFill>
-                  <a:srgbClr val="1A202C"/>
+                  <a:srgbClr val="FFFFFF"/>
                 </a:solidFill>
                 <a:latin typeface="Calibri" pitchFamily="34" charset="0"/>
                 <a:ea typeface="Calibri" pitchFamily="34" charset="-122"/>
@@ -2189,7 +1998,7 @@
             <a:r>
               <a:rPr lang="en-US" sz="800" dirty="0">
                 <a:solidFill>
-                  <a:srgbClr val="1A202C"/>
+                  <a:srgbClr val="FFFFFF"/>
                 </a:solidFill>
                 <a:latin typeface="Calibri" pitchFamily="34" charset="0"/>
                 <a:ea typeface="Calibri" pitchFamily="34" charset="-122"/>
@@ -2210,7 +2019,7 @@
             <a:r>
               <a:rPr lang="en-US" sz="800" dirty="0">
                 <a:solidFill>
-                  <a:srgbClr val="1A202C"/>
+                  <a:srgbClr val="FFFFFF"/>
                 </a:solidFill>
                 <a:latin typeface="Calibri" pitchFamily="34" charset="0"/>
                 <a:ea typeface="Calibri" pitchFamily="34" charset="-122"/>
@@ -2231,13 +2040,13 @@
             <a:r>
               <a:rPr lang="en-US" sz="800" dirty="0">
                 <a:solidFill>
-                  <a:srgbClr val="1A202C"/>
-                </a:solidFill>
-                <a:latin typeface="Calibri" pitchFamily="34" charset="0"/>
-                <a:ea typeface="Calibri" pitchFamily="34" charset="-122"/>
-                <a:cs typeface="Calibri" pitchFamily="34" charset="-120"/>
-              </a:rPr>
-              <a:t>Connaître les obligations ADS et attestation de conformité</a:t>
+                  <a:srgbClr val="FFFFFF"/>
+                </a:solidFill>
+                <a:latin typeface="Calibri" pitchFamily="34" charset="0"/>
+                <a:ea typeface="Calibri" pitchFamily="34" charset="-122"/>
+                <a:cs typeface="Calibri" pitchFamily="34" charset="-120"/>
+              </a:rPr>
+              <a:t>Connaître les obligations ADS et le justificatif d'exploitation</a:t>
             </a:r>
             <a:endParaRPr lang="en-US" sz="800" dirty="0"/>
           </a:p>
@@ -2252,7 +2061,7 @@
             <a:r>
               <a:rPr lang="en-US" sz="800" dirty="0">
                 <a:solidFill>
-                  <a:srgbClr val="1A202C"/>
+                  <a:srgbClr val="FFFFFF"/>
                 </a:solidFill>
                 <a:latin typeface="Calibri" pitchFamily="34" charset="0"/>
                 <a:ea typeface="Calibri" pitchFamily="34" charset="-122"/>
@@ -2273,7 +2082,7 @@
             <a:r>
               <a:rPr lang="en-US" sz="800" dirty="0">
                 <a:solidFill>
-                  <a:srgbClr val="1A202C"/>
+                  <a:srgbClr val="FFFFFF"/>
                 </a:solidFill>
                 <a:latin typeface="Calibri" pitchFamily="34" charset="0"/>
                 <a:ea typeface="Calibri" pitchFamily="34" charset="-122"/>
@@ -2312,7 +2121,7 @@
             <a:r>
               <a:rPr lang="en-US" sz="900" b="1" kern="0" spc="200" dirty="0">
                 <a:solidFill>
-                  <a:srgbClr val="1A202C"/>
+                  <a:srgbClr val="D4A843"/>
                 </a:solidFill>
                 <a:latin typeface="Calibri" pitchFamily="34" charset="0"/>
                 <a:ea typeface="Calibri" pitchFamily="34" charset="-122"/>
@@ -2355,7 +2164,7 @@
             <a:r>
               <a:rPr lang="en-US" sz="800" dirty="0">
                 <a:solidFill>
-                  <a:srgbClr val="1A202C"/>
+                  <a:srgbClr val="FFFFFF"/>
                 </a:solidFill>
                 <a:latin typeface="Calibri" pitchFamily="34" charset="0"/>
                 <a:ea typeface="Calibri" pitchFamily="34" charset="-122"/>
@@ -2376,7 +2185,7 @@
             <a:r>
               <a:rPr lang="en-US" sz="800" dirty="0">
                 <a:solidFill>
-                  <a:srgbClr val="1A202C"/>
+                  <a:srgbClr val="FFFFFF"/>
                 </a:solidFill>
                 <a:latin typeface="Calibri" pitchFamily="34" charset="0"/>
                 <a:ea typeface="Calibri" pitchFamily="34" charset="-122"/>
@@ -2397,7 +2206,7 @@
             <a:r>
               <a:rPr lang="en-US" sz="800" dirty="0">
                 <a:solidFill>
-                  <a:srgbClr val="1A202C"/>
+                  <a:srgbClr val="FFFFFF"/>
                 </a:solidFill>
                 <a:latin typeface="Calibri" pitchFamily="34" charset="0"/>
                 <a:ea typeface="Calibri" pitchFamily="34" charset="-122"/>
@@ -2418,13 +2227,13 @@
             <a:r>
               <a:rPr lang="en-US" sz="800" dirty="0">
                 <a:solidFill>
-                  <a:srgbClr val="1A202C"/>
-                </a:solidFill>
-                <a:latin typeface="Calibri" pitchFamily="34" charset="0"/>
-                <a:ea typeface="Calibri" pitchFamily="34" charset="-122"/>
-                <a:cs typeface="Calibri" pitchFamily="34" charset="-120"/>
-              </a:rPr>
-              <a:t>ADS — Obligations, exploitation, attestation de conformité</a:t>
+                  <a:srgbClr val="FFFFFF"/>
+                </a:solidFill>
+                <a:latin typeface="Calibri" pitchFamily="34" charset="0"/>
+                <a:ea typeface="Calibri" pitchFamily="34" charset="-122"/>
+                <a:cs typeface="Calibri" pitchFamily="34" charset="-120"/>
+              </a:rPr>
+              <a:t>ADS — Obligations, exploitation, justificatif</a:t>
             </a:r>
             <a:endParaRPr lang="en-US" sz="800" dirty="0"/>
           </a:p>
@@ -2439,7 +2248,7 @@
             <a:r>
               <a:rPr lang="en-US" sz="800" dirty="0">
                 <a:solidFill>
-                  <a:srgbClr val="1A202C"/>
+                  <a:srgbClr val="FFFFFF"/>
                 </a:solidFill>
                 <a:latin typeface="Calibri" pitchFamily="34" charset="0"/>
                 <a:ea typeface="Calibri" pitchFamily="34" charset="-122"/>
@@ -2460,7 +2269,7 @@
             <a:r>
               <a:rPr lang="en-US" sz="800" dirty="0">
                 <a:solidFill>
-                  <a:srgbClr val="1A202C"/>
+                  <a:srgbClr val="FFFFFF"/>
                 </a:solidFill>
                 <a:latin typeface="Calibri" pitchFamily="34" charset="0"/>
                 <a:ea typeface="Calibri" pitchFamily="34" charset="-122"/>
@@ -2508,57 +2317,6 @@
               <a:t>Déclaration n° 84 69 15114 69  •  Qualiopi</a:t>
             </a:r>
             <a:endParaRPr lang="en-US" sz="700" dirty="0"/>
-          </a:p>
-        </p:txBody>
-      </p:sp>
-      <p:sp>
-        <p:nvSpPr>
-          <p:cNvPr id="11" name="Rectangle 10"/>
-          <p:cNvSpPr/>
-          <p:nvPr/>
-        </p:nvSpPr>
-        <p:spPr>
-          <a:xfrm>
-            <a:off x="0" y="0"/>
-            <a:ext cx="9144000" cy="251999"/>
-          </a:xfrm>
-          <a:prstGeom prst="rect">
-            <a:avLst/>
-          </a:prstGeom>
-          <a:solidFill>
-            <a:srgbClr val="F2F2F2"/>
-          </a:solidFill>
-          <a:ln>
-            <a:noFill/>
-          </a:ln>
-        </p:spPr>
-        <p:style>
-          <a:lnRef idx="1">
-            <a:schemeClr val="accent1"/>
-          </a:lnRef>
-          <a:fillRef idx="3">
-            <a:schemeClr val="accent1"/>
-          </a:fillRef>
-          <a:effectRef idx="2">
-            <a:schemeClr val="accent1"/>
-          </a:effectRef>
-          <a:fontRef idx="minor">
-            <a:schemeClr val="lt1"/>
-          </a:fontRef>
-        </p:style>
-        <p:txBody>
-          <a:bodyPr wrap="square" rtlCol="0" anchor="ctr"/>
-          <a:lstStyle/>
-          <a:p>
-            <a:pPr algn="ctr"/>
-            <a:r>
-              <a:rPr sz="1000" b="1">
-                <a:solidFill>
-                  <a:srgbClr val="1A202C"/>
-                </a:solidFill>
-              </a:rPr>
-              <a:t>ÉPREUVE RÉGLEMENTATION LOCALE — Partie 2 sur 3</a:t>
-            </a:r>
           </a:p>
         </p:txBody>
       </p:sp>
@@ -2576,7 +2334,7 @@
     <p:bg>
       <p:bgPr>
         <a:solidFill>
-          <a:srgbClr val="F2F2F2"/>
+          <a:srgbClr val="F7F8FA"/>
         </a:solidFill>
         <a:effectLst/>
       </p:bgPr>
@@ -2610,7 +2368,7 @@
             <a:avLst/>
           </a:prstGeom>
           <a:solidFill>
-            <a:srgbClr val="F2F2F2"/>
+            <a:srgbClr val="283A5E"/>
           </a:solidFill>
           <a:ln/>
         </p:spPr>
@@ -2649,7 +2407,7 @@
             <a:r>
               <a:rPr lang="en-US" sz="900" b="1" kern="0" spc="200" dirty="0">
                 <a:solidFill>
-                  <a:srgbClr val="1A202C"/>
+                  <a:srgbClr val="D4A843"/>
                 </a:solidFill>
                 <a:latin typeface="Calibri" pitchFamily="34" charset="0"/>
                 <a:ea typeface="Calibri" pitchFamily="34" charset="-122"/>
@@ -2694,7 +2452,7 @@
                 <a:ea typeface="Georgia" pitchFamily="34" charset="-122"/>
                 <a:cs typeface="Georgia" pitchFamily="34" charset="-120"/>
               </a:rPr>
-              <a:t>Véhicules de remplacement</a:t>
+              <a:t>Véhicules de remplacement — dispositif annulé</a:t>
             </a:r>
             <a:endParaRPr lang="en-US" sz="1800" dirty="0"/>
           </a:p>
@@ -2751,13 +2509,13 @@
             <a:r>
               <a:rPr lang="en-US" sz="1200" b="1" dirty="0">
                 <a:solidFill>
-                  <a:srgbClr val="1A202C"/>
-                </a:solidFill>
-                <a:latin typeface="Calibri" pitchFamily="34" charset="0"/>
-                <a:ea typeface="Calibri" pitchFamily="34" charset="-122"/>
-                <a:cs typeface="Calibri" pitchFamily="34" charset="-120"/>
-              </a:rPr>
-              <a:t>Qui peut en disposer ?</a:t>
+                  <a:srgbClr val="0D9488"/>
+                </a:solidFill>
+                <a:latin typeface="Calibri" pitchFamily="34" charset="0"/>
+                <a:ea typeface="Calibri" pitchFamily="34" charset="-122"/>
+                <a:cs typeface="Calibri" pitchFamily="34" charset="-120"/>
+              </a:rPr>
+              <a:t>Situation juridique depuis 2024</a:t>
             </a:r>
             <a:endParaRPr lang="en-US" sz="1200" dirty="0"/>
           </a:p>
@@ -2812,7 +2570,7 @@
             <a:avLst/>
           </a:prstGeom>
           <a:solidFill>
-            <a:srgbClr val="EEEEEE"/>
+            <a:srgbClr val="0D9488"/>
           </a:solidFill>
           <a:ln/>
         </p:spPr>
@@ -2857,7 +2615,7 @@
                 <a:ea typeface="Calibri" pitchFamily="34" charset="-122"/>
                 <a:cs typeface="Calibri" pitchFamily="34" charset="-120"/>
               </a:rPr>
-              <a:t>En cas d'immobilisation pour réparation du véhicule,</a:t>
+              <a:t>Dispositif annulé par la justice</a:t>
             </a:r>
             <a:endParaRPr lang="en-US" sz="1000" dirty="0"/>
           </a:p>
@@ -2896,7 +2654,7 @@
                 <a:ea typeface="Calibri" pitchFamily="34" charset="-122"/>
                 <a:cs typeface="Calibri" pitchFamily="34" charset="-120"/>
               </a:rPr>
-              <a:t>de ses équipements spécifiques, ou en cas de vol,</a:t>
+              <a:t>CAA de Lyon, 19/01/2024 : le président de la Métropole n'avait pas compétence pour créer ce dispositif de prêt (paragraphe 6-1 de l'arrêté annulé).</a:t>
             </a:r>
             <a:endParaRPr lang="en-US" sz="800" dirty="0"/>
           </a:p>
@@ -2951,7 +2709,7 @@
             <a:avLst/>
           </a:prstGeom>
           <a:solidFill>
-            <a:srgbClr val="EEEEEE"/>
+            <a:srgbClr val="0D9488"/>
           </a:solidFill>
           <a:ln/>
         </p:spPr>
@@ -2996,7 +2754,7 @@
                 <a:ea typeface="Calibri" pitchFamily="34" charset="-122"/>
                 <a:cs typeface="Calibri" pitchFamily="34" charset="-120"/>
               </a:rPr>
-              <a:t>le taxi peut être remplacé temporairement</a:t>
+              <a:t>Aucun cadre métropolitain</a:t>
             </a:r>
             <a:endParaRPr lang="en-US" sz="1000" dirty="0"/>
           </a:p>
@@ -3035,7 +2793,7 @@
                 <a:ea typeface="Calibri" pitchFamily="34" charset="-122"/>
                 <a:cs typeface="Calibri" pitchFamily="34" charset="-120"/>
               </a:rPr>
-              <a:t>par un véhicule dénommé taxi-relais.</a:t>
+              <a:t>La Métropole ne peut plus organiser ni encadrer un système de prêt de véhicules de remplacement entre professionnels.</a:t>
             </a:r>
             <a:endParaRPr lang="en-US" sz="800" dirty="0"/>
           </a:p>
@@ -3090,7 +2848,7 @@
             <a:avLst/>
           </a:prstGeom>
           <a:solidFill>
-            <a:srgbClr val="EEEEEE"/>
+            <a:srgbClr val="0D9488"/>
           </a:solidFill>
           <a:ln/>
         </p:spPr>
@@ -3135,7 +2893,7 @@
                 <a:ea typeface="Calibri" pitchFamily="34" charset="-122"/>
                 <a:cs typeface="Calibri" pitchFamily="34" charset="-120"/>
               </a:rPr>
-              <a:t>Le taxi-relais doit disposer des équipements</a:t>
+              <a:t>Solutions hors cadre réglementaire</a:t>
             </a:r>
             <a:endParaRPr lang="en-US" sz="1000" dirty="0"/>
           </a:p>
@@ -3174,7 +2932,7 @@
                 <a:ea typeface="Calibri" pitchFamily="34" charset="-122"/>
                 <a:cs typeface="Calibri" pitchFamily="34" charset="-120"/>
               </a:rPr>
-              <a:t>taxis énumérés à l'art. R 3121-1 du code des transports.</a:t>
+              <a:t>Les professionnels peuvent recourir à des arrangements privés (location, entraide entre confrères) hors de tout dispositif métropolitain organisé.</a:t>
             </a:r>
             <a:endParaRPr lang="en-US" sz="800" dirty="0"/>
           </a:p>
@@ -3265,13 +3023,13 @@
             <a:r>
               <a:rPr lang="en-US" sz="1200" b="1" dirty="0">
                 <a:solidFill>
-                  <a:srgbClr val="1A202C"/>
-                </a:solidFill>
-                <a:latin typeface="Calibri" pitchFamily="34" charset="0"/>
-                <a:ea typeface="Calibri" pitchFamily="34" charset="-122"/>
-                <a:cs typeface="Calibri" pitchFamily="34" charset="-120"/>
-              </a:rPr>
-              <a:t>Conditions &amp; procédure</a:t>
+                  <a:srgbClr val="C05621"/>
+                </a:solidFill>
+                <a:latin typeface="Calibri" pitchFamily="34" charset="0"/>
+                <a:ea typeface="Calibri" pitchFamily="34" charset="-122"/>
+                <a:cs typeface="Calibri" pitchFamily="34" charset="-120"/>
+              </a:rPr>
+              <a:t>Ce qu'il faut retenir</a:t>
             </a:r>
             <a:endParaRPr lang="en-US" sz="1200" dirty="0"/>
           </a:p>
@@ -3306,7 +3064,7 @@
             </a:pPr>
             <a:endParaRPr lang="en-US" sz="900" b="1" dirty="0">
               <a:solidFill>
-                <a:srgbClr val="1A202C"/>
+                <a:srgbClr val="C53030"/>
               </a:solidFill>
               <a:latin typeface="Calibri" pitchFamily="34" charset="0"/>
               <a:ea typeface="Calibri" pitchFamily="34" charset="-122"/>
@@ -3323,35 +3081,25 @@
             <a:r>
               <a:rPr lang="en-US" sz="900" b="1" dirty="0">
                 <a:solidFill>
+                  <a:srgbClr val="C53030"/>
+                </a:solidFill>
+                <a:latin typeface="Calibri" pitchFamily="34" charset="0"/>
+                <a:ea typeface="Calibri" pitchFamily="34" charset="-122"/>
+                <a:cs typeface="Calibri" pitchFamily="34" charset="-120"/>
+              </a:rPr>
+              <a:t>Dispositif annulé : la Métropole ne peut plus imposer ni encadrer </a:t>
+            </a:r>
+            <a:r>
+              <a:rPr lang="en-US" sz="850" dirty="0">
+                <a:solidFill>
                   <a:srgbClr val="1A202C"/>
                 </a:solidFill>
                 <a:latin typeface="Calibri" pitchFamily="34" charset="0"/>
                 <a:ea typeface="Calibri" pitchFamily="34" charset="-122"/>
                 <a:cs typeface="Calibri" pitchFamily="34" charset="-120"/>
               </a:rPr>
-              <a:t>La gestion des taxis-relais est de compétence préfectorale. </a:t>
-            </a:r>
-            <a:r>
-              <a:rPr lang="en-US" sz="850" dirty="0">
-                <a:solidFill>
-                  <a:srgbClr val="1A202C"/>
-                </a:solidFill>
-                <a:latin typeface="Calibri" pitchFamily="34" charset="0"/>
-                <a:ea typeface="Calibri" pitchFamily="34" charset="-122"/>
-                <a:cs typeface="Calibri" pitchFamily="34" charset="-120"/>
-              </a:rPr>
-              <a:t>sur l'ensemble du territoire de la </a:t>
-            </a:r>
-            <a:r>
-              <a:rPr lang="en-US" sz="850" dirty="0" err="1">
-                <a:solidFill>
-                  <a:srgbClr val="1A202C"/>
-                </a:solidFill>
-                <a:latin typeface="Calibri" pitchFamily="34" charset="0"/>
-                <a:ea typeface="Calibri" pitchFamily="34" charset="-122"/>
-                <a:cs typeface="Calibri" pitchFamily="34" charset="-120"/>
-              </a:rPr>
-              <a:t>Métropole</a:t>
+              <a:t>de quotas de véhicules de remplacement.
+</a:t>
             </a:r>
             <a:endParaRPr lang="en-US" sz="900" dirty="0"/>
           </a:p>
@@ -3365,13 +3113,14 @@
             <a:r>
               <a:rPr lang="en-US" sz="900" b="1" dirty="0">
                 <a:solidFill>
-                  <a:srgbClr val="1A202C"/>
-                </a:solidFill>
-                <a:latin typeface="Calibri" pitchFamily="34" charset="0"/>
-                <a:ea typeface="Calibri" pitchFamily="34" charset="-122"/>
-                <a:cs typeface="Calibri" pitchFamily="34" charset="-120"/>
-              </a:rPr>
-              <a:t>La demande se fait sur le site officiel mesads.beta.gouv.fr</a:t>
+                  <a:srgbClr val="C53030"/>
+                </a:solidFill>
+                <a:latin typeface="Calibri" pitchFamily="34" charset="0"/>
+                <a:ea typeface="Calibri" pitchFamily="34" charset="-122"/>
+                <a:cs typeface="Calibri" pitchFamily="34" charset="-120"/>
+              </a:rPr>
+              <a:t>Ancien système (avant 2024, à titre historique) : 26 véhicules max au total, 4 par bénéficiaire
+</a:t>
             </a:r>
             <a:endParaRPr lang="en-US" sz="900" dirty="0"/>
           </a:p>
@@ -3391,7 +3140,7 @@
                 <a:ea typeface="Calibri" pitchFamily="34" charset="-122"/>
                 <a:cs typeface="Calibri" pitchFamily="34" charset="-120"/>
               </a:rPr>
-              <a:t>(Art. 10 — Arrêté métropolitain du 27/11/2024)
+              <a:t>Aucune autorisation ni inscription auprès du Service Taxis Métropole n'est plus requise pour ce type de prêt
 </a:t>
             </a:r>
             <a:endParaRPr lang="en-US" sz="900" dirty="0"/>
@@ -3406,13 +3155,13 @@
             <a:r>
               <a:rPr lang="en-US" sz="850" b="1" dirty="0">
                 <a:solidFill>
-                  <a:srgbClr val="1A202C"/>
-                </a:solidFill>
-                <a:latin typeface="Calibri" pitchFamily="34" charset="0"/>
-                <a:ea typeface="Calibri" pitchFamily="34" charset="-122"/>
-                <a:cs typeface="Calibri" pitchFamily="34" charset="-120"/>
-              </a:rPr>
-              <a:t>Déclaration sur mesads.beta.gouv.fr (site officiel de l'État)</a:t>
+                  <a:srgbClr val="283A5E"/>
+                </a:solidFill>
+                <a:latin typeface="Calibri" pitchFamily="34" charset="0"/>
+                <a:ea typeface="Calibri" pitchFamily="34" charset="-122"/>
+                <a:cs typeface="Calibri" pitchFamily="34" charset="-120"/>
+              </a:rPr>
+              <a:t>À vérifier : un nouveau dispositif légal pourrait être recréé ultérieurement par une autre voie réglementaire</a:t>
             </a:r>
             <a:endParaRPr lang="en-US" sz="900" dirty="0"/>
           </a:p>
@@ -3433,7 +3182,7 @@
             <a:avLst/>
           </a:prstGeom>
           <a:solidFill>
-            <a:srgbClr val="F2F2F2"/>
+            <a:srgbClr val="1E2A3A"/>
           </a:solidFill>
           <a:ln/>
         </p:spPr>
@@ -3511,7 +3260,7 @@
             <a:r>
               <a:rPr lang="en-US" sz="800" b="1" dirty="0">
                 <a:solidFill>
-                  <a:srgbClr val="1A202C"/>
+                  <a:srgbClr val="FFFFFF"/>
                 </a:solidFill>
                 <a:latin typeface="Calibri" pitchFamily="34" charset="0"/>
                 <a:ea typeface="Calibri" pitchFamily="34" charset="-122"/>
@@ -3520,57 +3269,6 @@
               <a:t>10</a:t>
             </a:r>
             <a:endParaRPr lang="en-US" sz="800" dirty="0"/>
-          </a:p>
-        </p:txBody>
-      </p:sp>
-      <p:sp>
-        <p:nvSpPr>
-          <p:cNvPr id="26" name="Rectangle 25"/>
-          <p:cNvSpPr/>
-          <p:nvPr/>
-        </p:nvSpPr>
-        <p:spPr>
-          <a:xfrm>
-            <a:off x="0" y="0"/>
-            <a:ext cx="9144000" cy="251999"/>
-          </a:xfrm>
-          <a:prstGeom prst="rect">
-            <a:avLst/>
-          </a:prstGeom>
-          <a:solidFill>
-            <a:srgbClr val="F2F2F2"/>
-          </a:solidFill>
-          <a:ln>
-            <a:noFill/>
-          </a:ln>
-        </p:spPr>
-        <p:style>
-          <a:lnRef idx="1">
-            <a:schemeClr val="accent1"/>
-          </a:lnRef>
-          <a:fillRef idx="3">
-            <a:schemeClr val="accent1"/>
-          </a:fillRef>
-          <a:effectRef idx="2">
-            <a:schemeClr val="accent1"/>
-          </a:effectRef>
-          <a:fontRef idx="minor">
-            <a:schemeClr val="lt1"/>
-          </a:fontRef>
-        </p:style>
-        <p:txBody>
-          <a:bodyPr wrap="square" rtlCol="0" anchor="ctr"/>
-          <a:lstStyle/>
-          <a:p>
-            <a:pPr algn="ctr"/>
-            <a:r>
-              <a:rPr sz="1000" b="1">
-                <a:solidFill>
-                  <a:srgbClr val="1A202C"/>
-                </a:solidFill>
-              </a:rPr>
-              <a:t>ÉPREUVE RÉGLEMENTATION LOCALE — Partie 2 sur 3</a:t>
-            </a:r>
           </a:p>
         </p:txBody>
       </p:sp>
@@ -3588,7 +3286,7 @@
     <p:bg>
       <p:bgPr>
         <a:solidFill>
-          <a:srgbClr val="F2F2F2"/>
+          <a:srgbClr val="F7F8FA"/>
         </a:solidFill>
         <a:effectLst/>
       </p:bgPr>
@@ -3622,7 +3320,7 @@
             <a:avLst/>
           </a:prstGeom>
           <a:solidFill>
-            <a:srgbClr val="F2F2F2"/>
+            <a:srgbClr val="283A5E"/>
           </a:solidFill>
           <a:ln/>
         </p:spPr>
@@ -3661,7 +3359,7 @@
             <a:r>
               <a:rPr lang="en-US" sz="900" b="1" kern="0" spc="200" dirty="0">
                 <a:solidFill>
-                  <a:srgbClr val="1A202C"/>
+                  <a:srgbClr val="D4A843"/>
                 </a:solidFill>
                 <a:latin typeface="Calibri" pitchFamily="34" charset="0"/>
                 <a:ea typeface="Calibri" pitchFamily="34" charset="-122"/>
@@ -3797,7 +3495,7 @@
             <a:r>
               <a:rPr lang="en-US" sz="1100" b="1" dirty="0">
                 <a:solidFill>
-                  <a:srgbClr val="1A202C"/>
+                  <a:srgbClr val="2B6CB0"/>
                 </a:solidFill>
                 <a:latin typeface="Calibri" pitchFamily="34" charset="0"/>
                 <a:ea typeface="Calibri" pitchFamily="34" charset="-122"/>
@@ -3842,7 +3540,7 @@
                 <a:ea typeface="Calibri" pitchFamily="34" charset="-122"/>
                 <a:cs typeface="Calibri" pitchFamily="34" charset="-120"/>
               </a:rPr>
-              <a:t>Le Service Taxis Métropole gère l'ensemble des listes d'attente. Une liste par commune. Attestation d'inscription valable 1 an. En cas de demandes simultanées : tirage au sort.</a:t>
+              <a:t>Listes d'attente gérées par Service Taxis Métropole. Une liste/commune. Attestation valable 1 an. Demandes simultanées : tirage au sort.</a:t>
             </a:r>
             <a:endParaRPr lang="en-US" sz="850" dirty="0"/>
           </a:p>
@@ -3863,7 +3561,7 @@
             <a:avLst/>
           </a:prstGeom>
           <a:solidFill>
-            <a:srgbClr val="F8F8F8"/>
+            <a:srgbClr val="FFF5F5"/>
           </a:solidFill>
           <a:ln/>
         </p:spPr>
@@ -3902,7 +3600,7 @@
             <a:r>
               <a:rPr lang="en-US" sz="800" b="1" dirty="0">
                 <a:solidFill>
-                  <a:srgbClr val="1A202C"/>
+                  <a:srgbClr val="C53030"/>
                 </a:solidFill>
                 <a:latin typeface="Calibri" pitchFamily="34" charset="0"/>
                 <a:ea typeface="Calibri" pitchFamily="34" charset="-122"/>
@@ -3997,48 +3695,15 @@
               <a:buNone/>
             </a:pPr>
             <a:r>
-              <a:rPr lang="en-US" sz="1050" b="1" dirty="0" err="1">
-                <a:solidFill>
-                  <a:srgbClr val="1A202C"/>
-                </a:solidFill>
-                <a:latin typeface="Calibri" pitchFamily="34" charset="0"/>
-                <a:ea typeface="Calibri" pitchFamily="34" charset="-122"/>
-                <a:cs typeface="Calibri" pitchFamily="34" charset="-120"/>
-              </a:rPr>
-              <a:t>Renouvellement</a:t>
-            </a:r>
-            <a:r>
               <a:rPr lang="en-US" sz="1050" b="1" dirty="0">
                 <a:solidFill>
-                  <a:srgbClr val="1A202C"/>
-                </a:solidFill>
-                <a:latin typeface="Calibri" pitchFamily="34" charset="0"/>
-                <a:ea typeface="Calibri" pitchFamily="34" charset="-122"/>
-                <a:cs typeface="Calibri" pitchFamily="34" charset="-120"/>
-              </a:rPr>
-              <a:t> (à la date </a:t>
-            </a:r>
-            <a:r>
-              <a:rPr lang="en-US" sz="1050" b="1" dirty="0" err="1">
-                <a:solidFill>
-                  <a:srgbClr val="1A202C"/>
-                </a:solidFill>
-                <a:latin typeface="Calibri" pitchFamily="34" charset="0"/>
-                <a:ea typeface="Calibri" pitchFamily="34" charset="-122"/>
-                <a:cs typeface="Calibri" pitchFamily="34" charset="-120"/>
-              </a:rPr>
-              <a:t>d’anniversaire</a:t>
-            </a:r>
-            <a:r>
-              <a:rPr lang="en-US" sz="1050" b="1" dirty="0">
-                <a:solidFill>
-                  <a:srgbClr val="1A202C"/>
-                </a:solidFill>
-                <a:latin typeface="Calibri" pitchFamily="34" charset="0"/>
-                <a:ea typeface="Calibri" pitchFamily="34" charset="-122"/>
-                <a:cs typeface="Calibri" pitchFamily="34" charset="-120"/>
-              </a:rPr>
-              <a:t>)</a:t>
+                  <a:srgbClr val="C05621"/>
+                </a:solidFill>
+                <a:latin typeface="Calibri" pitchFamily="34" charset="0"/>
+                <a:ea typeface="Calibri" pitchFamily="34" charset="-122"/>
+                <a:cs typeface="Calibri" pitchFamily="34" charset="-120"/>
+              </a:rPr>
+              <a:t>Renouvellement (3 mois avant échéance)</a:t>
             </a:r>
             <a:endParaRPr lang="en-US" sz="1050" dirty="0"/>
           </a:p>
@@ -4140,7 +3805,7 @@
             <a:r>
               <a:rPr lang="en-US" sz="850" b="1" dirty="0">
                 <a:solidFill>
-                  <a:srgbClr val="1A202C"/>
+                  <a:srgbClr val="283A5E"/>
                 </a:solidFill>
                 <a:latin typeface="Calibri" pitchFamily="34" charset="0"/>
                 <a:ea typeface="Calibri" pitchFamily="34" charset="-122"/>
@@ -4237,7 +3902,7 @@
             <a:r>
               <a:rPr lang="en-US" sz="1100" b="1" dirty="0">
                 <a:solidFill>
-                  <a:srgbClr val="1A202C"/>
+                  <a:srgbClr val="276749"/>
                 </a:solidFill>
                 <a:latin typeface="Calibri" pitchFamily="34" charset="0"/>
                 <a:ea typeface="Calibri" pitchFamily="34" charset="-122"/>
@@ -4277,14 +3942,19 @@
               <a:buSzPct val="100000"/>
               <a:buChar char="•"/>
             </a:pPr>
-            <a:endParaRPr lang="en-US" sz="850" dirty="0">
-              <a:solidFill>
-                <a:srgbClr val="1A202C"/>
-              </a:solidFill>
-              <a:latin typeface="Calibri" pitchFamily="34" charset="0"/>
-              <a:ea typeface="Calibri" pitchFamily="34" charset="-122"/>
-              <a:cs typeface="Calibri" pitchFamily="34" charset="-120"/>
-            </a:endParaRPr>
+            <a:r>
+              <a:rPr lang="en-US" sz="850" dirty="0">
+                <a:solidFill>
+                  <a:srgbClr val="1A202C"/>
+                </a:solidFill>
+                <a:latin typeface="Calibri" pitchFamily="34" charset="0"/>
+                <a:ea typeface="Calibri" pitchFamily="34" charset="-122"/>
+                <a:cs typeface="Calibri" pitchFamily="34" charset="-120"/>
+              </a:rPr>
+              <a:t>Attestation sur l'honneur de non-détention d'ADS sur le territoire national
+</a:t>
+            </a:r>
+            <a:endParaRPr lang="en-US" sz="850" dirty="0"/>
           </a:p>
           <a:p>
             <a:pPr marL="342900" indent="-342900">
@@ -4303,29 +3973,8 @@
                 <a:ea typeface="Calibri" pitchFamily="34" charset="-122"/>
                 <a:cs typeface="Calibri" pitchFamily="34" charset="-120"/>
               </a:rPr>
-              <a:t>Attestation sur l'honneur de non-détention d'ADS sur le </a:t>
-            </a:r>
-            <a:r>
-              <a:rPr lang="en-US" sz="850" dirty="0" err="1">
-                <a:solidFill>
-                  <a:srgbClr val="1A202C"/>
-                </a:solidFill>
-                <a:latin typeface="Calibri" pitchFamily="34" charset="0"/>
-                <a:ea typeface="Calibri" pitchFamily="34" charset="-122"/>
-                <a:cs typeface="Calibri" pitchFamily="34" charset="-120"/>
-              </a:rPr>
-              <a:t>territoire</a:t>
-            </a:r>
-            <a:r>
-              <a:rPr lang="en-US" sz="850" dirty="0">
-                <a:solidFill>
-                  <a:srgbClr val="1A202C"/>
-                </a:solidFill>
-                <a:latin typeface="Calibri" pitchFamily="34" charset="0"/>
-                <a:ea typeface="Calibri" pitchFamily="34" charset="-122"/>
-                <a:cs typeface="Calibri" pitchFamily="34" charset="-120"/>
-              </a:rPr>
-              <a:t> national</a:t>
+              <a:t>Copie de la carte professionnelle en cours de validité
+</a:t>
             </a:r>
             <a:endParaRPr lang="en-US" sz="850" dirty="0"/>
           </a:p>
@@ -4346,18 +3995,8 @@
                 <a:ea typeface="Calibri" pitchFamily="34" charset="-122"/>
                 <a:cs typeface="Calibri" pitchFamily="34" charset="-120"/>
               </a:rPr>
-              <a:t>Copie de la carte professionnelle en cours de </a:t>
-            </a:r>
-            <a:r>
-              <a:rPr lang="en-US" sz="850" dirty="0" err="1">
-                <a:solidFill>
-                  <a:srgbClr val="1A202C"/>
-                </a:solidFill>
-                <a:latin typeface="Calibri" pitchFamily="34" charset="0"/>
-                <a:ea typeface="Calibri" pitchFamily="34" charset="-122"/>
-                <a:cs typeface="Calibri" pitchFamily="34" charset="-120"/>
-              </a:rPr>
-              <a:t>validité</a:t>
+              <a:t>Copie du certificat de capacité ou formation continue en cours de validité
+</a:t>
             </a:r>
             <a:endParaRPr lang="en-US" sz="850" dirty="0"/>
           </a:p>
@@ -4378,38 +4017,6 @@
                 <a:ea typeface="Calibri" pitchFamily="34" charset="-122"/>
                 <a:cs typeface="Calibri" pitchFamily="34" charset="-120"/>
               </a:rPr>
-              <a:t>Copie du certificat de capacité ou formation continue en cours de </a:t>
-            </a:r>
-            <a:r>
-              <a:rPr lang="en-US" sz="850" dirty="0" err="1">
-                <a:solidFill>
-                  <a:srgbClr val="1A202C"/>
-                </a:solidFill>
-                <a:latin typeface="Calibri" pitchFamily="34" charset="0"/>
-                <a:ea typeface="Calibri" pitchFamily="34" charset="-122"/>
-                <a:cs typeface="Calibri" pitchFamily="34" charset="-120"/>
-              </a:rPr>
-              <a:t>validité</a:t>
-            </a:r>
-            <a:endParaRPr lang="en-US" sz="850" dirty="0"/>
-          </a:p>
-          <a:p>
-            <a:pPr marL="342900" indent="-342900">
-              <a:spcAft>
-                <a:spcPts val="300"/>
-              </a:spcAft>
-              <a:buSzPct val="100000"/>
-              <a:buChar char="•"/>
-            </a:pPr>
-            <a:r>
-              <a:rPr lang="en-US" sz="850" dirty="0">
-                <a:solidFill>
-                  <a:srgbClr val="1A202C"/>
-                </a:solidFill>
-                <a:latin typeface="Calibri" pitchFamily="34" charset="0"/>
-                <a:ea typeface="Calibri" pitchFamily="34" charset="-122"/>
-                <a:cs typeface="Calibri" pitchFamily="34" charset="-120"/>
-              </a:rPr>
               <a:t>Copie de l'attestation préfectorale d'aptitude physique en cours de validité</a:t>
             </a:r>
             <a:endParaRPr lang="en-US" sz="850" dirty="0"/>
@@ -4431,7 +4038,7 @@
             <a:avLst/>
           </a:prstGeom>
           <a:solidFill>
-            <a:srgbClr val="F2F2F2"/>
+            <a:srgbClr val="1E2A3A"/>
           </a:solidFill>
           <a:ln/>
         </p:spPr>
@@ -4509,7 +4116,7 @@
             <a:r>
               <a:rPr lang="en-US" sz="800" b="1" dirty="0">
                 <a:solidFill>
-                  <a:srgbClr val="1A202C"/>
+                  <a:srgbClr val="FFFFFF"/>
                 </a:solidFill>
                 <a:latin typeface="Calibri" pitchFamily="34" charset="0"/>
                 <a:ea typeface="Calibri" pitchFamily="34" charset="-122"/>
@@ -4518,57 +4125,6 @@
               <a:t>11</a:t>
             </a:r>
             <a:endParaRPr lang="en-US" sz="800" dirty="0"/>
-          </a:p>
-        </p:txBody>
-      </p:sp>
-      <p:sp>
-        <p:nvSpPr>
-          <p:cNvPr id="22" name="Rectangle 21"/>
-          <p:cNvSpPr/>
-          <p:nvPr/>
-        </p:nvSpPr>
-        <p:spPr>
-          <a:xfrm>
-            <a:off x="0" y="0"/>
-            <a:ext cx="9144000" cy="251999"/>
-          </a:xfrm>
-          <a:prstGeom prst="rect">
-            <a:avLst/>
-          </a:prstGeom>
-          <a:solidFill>
-            <a:srgbClr val="F2F2F2"/>
-          </a:solidFill>
-          <a:ln>
-            <a:noFill/>
-          </a:ln>
-        </p:spPr>
-        <p:style>
-          <a:lnRef idx="1">
-            <a:schemeClr val="accent1"/>
-          </a:lnRef>
-          <a:fillRef idx="3">
-            <a:schemeClr val="accent1"/>
-          </a:fillRef>
-          <a:effectRef idx="2">
-            <a:schemeClr val="accent1"/>
-          </a:effectRef>
-          <a:fontRef idx="minor">
-            <a:schemeClr val="lt1"/>
-          </a:fontRef>
-        </p:style>
-        <p:txBody>
-          <a:bodyPr wrap="square" rtlCol="0" anchor="ctr"/>
-          <a:lstStyle/>
-          <a:p>
-            <a:pPr algn="ctr"/>
-            <a:r>
-              <a:rPr sz="1000" b="1">
-                <a:solidFill>
-                  <a:srgbClr val="1A202C"/>
-                </a:solidFill>
-              </a:rPr>
-              <a:t>ÉPREUVE RÉGLEMENTATION LOCALE — Partie 2 sur 3</a:t>
-            </a:r>
           </a:p>
         </p:txBody>
       </p:sp>
@@ -4586,7 +4142,7 @@
     <p:bg>
       <p:bgPr>
         <a:solidFill>
-          <a:srgbClr val="F2F2F2"/>
+          <a:srgbClr val="F7F8FA"/>
         </a:solidFill>
         <a:effectLst/>
       </p:bgPr>
@@ -4620,7 +4176,7 @@
             <a:avLst/>
           </a:prstGeom>
           <a:solidFill>
-            <a:srgbClr val="F2F2F2"/>
+            <a:srgbClr val="283A5E"/>
           </a:solidFill>
           <a:ln/>
         </p:spPr>
@@ -4659,7 +4215,7 @@
             <a:r>
               <a:rPr lang="en-US" sz="900" b="1" kern="0" spc="200" dirty="0">
                 <a:solidFill>
-                  <a:srgbClr val="1A202C"/>
+                  <a:srgbClr val="D4A843"/>
                 </a:solidFill>
                 <a:latin typeface="Calibri" pitchFamily="34" charset="0"/>
                 <a:ea typeface="Calibri" pitchFamily="34" charset="-122"/>
@@ -4795,7 +4351,7 @@
             <a:r>
               <a:rPr lang="en-US" sz="1200" b="1" dirty="0">
                 <a:solidFill>
-                  <a:srgbClr val="1A202C"/>
+                  <a:srgbClr val="276749"/>
                 </a:solidFill>
                 <a:latin typeface="Calibri" pitchFamily="34" charset="0"/>
                 <a:ea typeface="Calibri" pitchFamily="34" charset="-122"/>
@@ -4840,7 +4396,7 @@
                 <a:ea typeface="Calibri" pitchFamily="34" charset="-122"/>
                 <a:cs typeface="Calibri" pitchFamily="34" charset="-120"/>
               </a:rPr>
-              <a:t>Le titulaire de l'ADS doit s'acquitter des droits de stationnement. Ils sont fixés et perçus par la commune de rattachement de l'ADS, dans les conditions propres à chaque commune de la Métropole.</a:t>
+              <a:t>Droits de stationnement dus par le titulaire ADS. Fixés/perçus par la commune de rattachement, conditions propres à chaque commune.</a:t>
             </a:r>
             <a:endParaRPr lang="en-US" sz="900" dirty="0"/>
           </a:p>
@@ -4861,7 +4417,7 @@
             <a:avLst/>
           </a:prstGeom>
           <a:solidFill>
-            <a:srgbClr val="F8F8F8"/>
+            <a:srgbClr val="FFF5F5"/>
           </a:solidFill>
           <a:ln/>
         </p:spPr>
@@ -4900,13 +4456,13 @@
             <a:r>
               <a:rPr lang="en-US" sz="850" b="1" dirty="0">
                 <a:solidFill>
-                  <a:srgbClr val="1A202C"/>
-                </a:solidFill>
-                <a:latin typeface="Calibri" pitchFamily="34" charset="0"/>
-                <a:ea typeface="Calibri" pitchFamily="34" charset="-122"/>
-                <a:cs typeface="Calibri" pitchFamily="34" charset="-120"/>
-              </a:rPr>
-              <a:t>⚠️ Tout défaut de paiement est considéré comme un incident d'exploitation de l'ADS et pourra entraîner une sanction administrative.</a:t>
+                  <a:srgbClr val="C53030"/>
+                </a:solidFill>
+                <a:latin typeface="Calibri" pitchFamily="34" charset="0"/>
+                <a:ea typeface="Calibri" pitchFamily="34" charset="-122"/>
+                <a:cs typeface="Calibri" pitchFamily="34" charset="-120"/>
+              </a:rPr>
+              <a:t>⚠️ Défaut de paiement = incident d'exploitation → sanction administrative possible.</a:t>
             </a:r>
             <a:endParaRPr lang="en-US" sz="850" dirty="0"/>
           </a:p>
@@ -4997,7 +4553,7 @@
             <a:r>
               <a:rPr lang="en-US" sz="1200" b="1" dirty="0">
                 <a:solidFill>
-                  <a:srgbClr val="1A202C"/>
+                  <a:srgbClr val="C53030"/>
                 </a:solidFill>
                 <a:latin typeface="Calibri" pitchFamily="34" charset="0"/>
                 <a:ea typeface="Calibri" pitchFamily="34" charset="-122"/>
@@ -5036,7 +4592,7 @@
             <a:r>
               <a:rPr lang="en-US" sz="900" b="1" dirty="0">
                 <a:solidFill>
-                  <a:srgbClr val="1A202C"/>
+                  <a:srgbClr val="C53030"/>
                 </a:solidFill>
                 <a:latin typeface="Calibri" pitchFamily="34" charset="0"/>
                 <a:ea typeface="Calibri" pitchFamily="34" charset="-122"/>
@@ -5071,7 +4627,7 @@
                 <a:ea typeface="Calibri" pitchFamily="34" charset="-122"/>
                 <a:cs typeface="Calibri" pitchFamily="34" charset="-120"/>
               </a:rPr>
-              <a:t>Absence de Permis de Circuler sécurisé en cours de validité </a:t>
+              <a:t>Absence de justificatif d'exploitation valide (déclarations de revenus/avis d'imposition) </a:t>
             </a:r>
             <a:r>
               <a:rPr lang="en-US" sz="850" dirty="0">
@@ -5094,13 +4650,13 @@
             <a:r>
               <a:rPr lang="en-US" sz="850" b="1" dirty="0">
                 <a:solidFill>
-                  <a:srgbClr val="1A202C"/>
-                </a:solidFill>
-                <a:latin typeface="Calibri" pitchFamily="34" charset="0"/>
-                <a:ea typeface="Calibri" pitchFamily="34" charset="-122"/>
-                <a:cs typeface="Calibri" pitchFamily="34" charset="-120"/>
-              </a:rPr>
-              <a:t>La location-gérance n'exonère pas le titulaire de l'ADS de sa responsabilité sur l'exploitation.</a:t>
+                  <a:srgbClr val="283A5E"/>
+                </a:solidFill>
+                <a:latin typeface="Calibri" pitchFamily="34" charset="0"/>
+                <a:ea typeface="Calibri" pitchFamily="34" charset="-122"/>
+                <a:cs typeface="Calibri" pitchFamily="34" charset="-120"/>
+              </a:rPr>
+              <a:t>Location-gérance : ne dispense pas le titulaire ADS de sa responsabilité d'exploitation.</a:t>
             </a:r>
             <a:endParaRPr lang="en-US" sz="900" dirty="0"/>
           </a:p>
@@ -5121,7 +4677,7 @@
             <a:avLst/>
           </a:prstGeom>
           <a:solidFill>
-            <a:srgbClr val="F2F2F2"/>
+            <a:srgbClr val="1E2A3A"/>
           </a:solidFill>
           <a:ln/>
         </p:spPr>
@@ -5199,7 +4755,7 @@
             <a:r>
               <a:rPr lang="en-US" sz="800" b="1" dirty="0">
                 <a:solidFill>
-                  <a:srgbClr val="1A202C"/>
+                  <a:srgbClr val="FFFFFF"/>
                 </a:solidFill>
                 <a:latin typeface="Calibri" pitchFamily="34" charset="0"/>
                 <a:ea typeface="Calibri" pitchFamily="34" charset="-122"/>
@@ -5208,57 +4764,6 @@
               <a:t>12</a:t>
             </a:r>
             <a:endParaRPr lang="en-US" sz="800" dirty="0"/>
-          </a:p>
-        </p:txBody>
-      </p:sp>
-      <p:sp>
-        <p:nvSpPr>
-          <p:cNvPr id="18" name="Rectangle 17"/>
-          <p:cNvSpPr/>
-          <p:nvPr/>
-        </p:nvSpPr>
-        <p:spPr>
-          <a:xfrm>
-            <a:off x="0" y="0"/>
-            <a:ext cx="9144000" cy="251999"/>
-          </a:xfrm>
-          <a:prstGeom prst="rect">
-            <a:avLst/>
-          </a:prstGeom>
-          <a:solidFill>
-            <a:srgbClr val="F2F2F2"/>
-          </a:solidFill>
-          <a:ln>
-            <a:noFill/>
-          </a:ln>
-        </p:spPr>
-        <p:style>
-          <a:lnRef idx="1">
-            <a:schemeClr val="accent1"/>
-          </a:lnRef>
-          <a:fillRef idx="3">
-            <a:schemeClr val="accent1"/>
-          </a:fillRef>
-          <a:effectRef idx="2">
-            <a:schemeClr val="accent1"/>
-          </a:effectRef>
-          <a:fontRef idx="minor">
-            <a:schemeClr val="lt1"/>
-          </a:fontRef>
-        </p:style>
-        <p:txBody>
-          <a:bodyPr wrap="square" rtlCol="0" anchor="ctr"/>
-          <a:lstStyle/>
-          <a:p>
-            <a:pPr algn="ctr"/>
-            <a:r>
-              <a:rPr sz="1000" b="1">
-                <a:solidFill>
-                  <a:srgbClr val="1A202C"/>
-                </a:solidFill>
-              </a:rPr>
-              <a:t>ÉPREUVE RÉGLEMENTATION LOCALE — Partie 2 sur 3</a:t>
-            </a:r>
           </a:p>
         </p:txBody>
       </p:sp>
@@ -5276,7 +4781,7 @@
     <p:bg>
       <p:bgPr>
         <a:solidFill>
-          <a:srgbClr val="F2F2F2"/>
+          <a:srgbClr val="F7F8FA"/>
         </a:solidFill>
         <a:effectLst/>
       </p:bgPr>
@@ -5310,7 +4815,7 @@
             <a:avLst/>
           </a:prstGeom>
           <a:solidFill>
-            <a:srgbClr val="F2F2F2"/>
+            <a:srgbClr val="283A5E"/>
           </a:solidFill>
           <a:ln/>
         </p:spPr>
@@ -5349,7 +4854,7 @@
             <a:r>
               <a:rPr lang="en-US" sz="1000" b="1" kern="0" spc="300" dirty="0">
                 <a:solidFill>
-                  <a:srgbClr val="1A202C"/>
+                  <a:srgbClr val="D4A843"/>
                 </a:solidFill>
                 <a:latin typeface="Calibri" pitchFamily="34" charset="0"/>
                 <a:ea typeface="Calibri" pitchFamily="34" charset="-122"/>
@@ -5394,7 +4899,7 @@
                 <a:ea typeface="Calibri" pitchFamily="34" charset="-122"/>
                 <a:cs typeface="Calibri" pitchFamily="34" charset="-120"/>
               </a:rPr>
-              <a:t>Taximètre · Affichette · Notes · IMC · ADS · Permis de circuler · Conducteur · Véhicule · Remplacement · Listes d'attente</a:t>
+              <a:t>Taximètre · Affichette · Notes · IMC · ADS · Justificatif d'exploitation · Conducteur · Véhicule · Remplacement · Listes d'attente</a:t>
             </a:r>
             <a:endParaRPr lang="en-US" sz="750" dirty="0"/>
           </a:p>
@@ -5461,7 +4966,7 @@
             <a:r>
               <a:rPr lang="en-US" sz="950" b="1" dirty="0">
                 <a:solidFill>
-                  <a:srgbClr val="1A202C"/>
+                  <a:srgbClr val="283A5E"/>
                 </a:solidFill>
                 <a:latin typeface="Calibri" pitchFamily="34" charset="0"/>
                 <a:ea typeface="Calibri" pitchFamily="34" charset="-122"/>
@@ -5573,7 +5078,7 @@
             <a:r>
               <a:rPr lang="en-US" sz="950" b="1" dirty="0">
                 <a:solidFill>
-                  <a:srgbClr val="1A202C"/>
+                  <a:srgbClr val="283A5E"/>
                 </a:solidFill>
                 <a:latin typeface="Calibri" pitchFamily="34" charset="0"/>
                 <a:ea typeface="Calibri" pitchFamily="34" charset="-122"/>
@@ -5685,7 +5190,7 @@
             <a:r>
               <a:rPr lang="en-US" sz="950" b="1" dirty="0">
                 <a:solidFill>
-                  <a:srgbClr val="1A202C"/>
+                  <a:srgbClr val="283A5E"/>
                 </a:solidFill>
                 <a:latin typeface="Calibri" pitchFamily="34" charset="0"/>
                 <a:ea typeface="Calibri" pitchFamily="34" charset="-122"/>
@@ -5722,7 +5227,7 @@
               <a:buNone/>
             </a:pPr>
             <a:r>
-              <a:rPr lang="en-US" sz="750" dirty="0" err="1">
+              <a:rPr lang="en-US" sz="750" dirty="0">
                 <a:solidFill>
                   <a:srgbClr val="4A5568"/>
                 </a:solidFill>
@@ -5730,18 +5235,7 @@
                 <a:ea typeface="Calibri" pitchFamily="34" charset="-122"/>
                 <a:cs typeface="Calibri" pitchFamily="34" charset="-120"/>
               </a:rPr>
-              <a:t>Lettre</a:t>
-            </a:r>
-            <a:r>
-              <a:rPr lang="en-US" sz="750" dirty="0">
-                <a:solidFill>
-                  <a:srgbClr val="4A5568"/>
-                </a:solidFill>
-                <a:latin typeface="Calibri" pitchFamily="34" charset="0"/>
-                <a:ea typeface="Calibri" pitchFamily="34" charset="-122"/>
-                <a:cs typeface="Calibri" pitchFamily="34" charset="-120"/>
-              </a:rPr>
-              <a:t> L verte . 2 mois pour modifier la table tarifaire. Tableau de correspondance entre-temps. Suppléments sans taximètre.</a:t>
+              <a:t>Lettre L verte. 2 mois pour modifier la table tarifaire. Tableau de correspondance entre-temps. Suppléments sans taximètre.</a:t>
             </a:r>
             <a:endParaRPr lang="en-US" sz="750" dirty="0"/>
           </a:p>
@@ -5808,7 +5302,7 @@
             <a:r>
               <a:rPr lang="en-US" sz="950" b="1" dirty="0">
                 <a:solidFill>
-                  <a:srgbClr val="1A202C"/>
+                  <a:srgbClr val="283A5E"/>
                 </a:solidFill>
                 <a:latin typeface="Calibri" pitchFamily="34" charset="0"/>
                 <a:ea typeface="Calibri" pitchFamily="34" charset="-122"/>
@@ -5920,13 +5414,13 @@
             <a:r>
               <a:rPr lang="en-US" sz="950" b="1" dirty="0">
                 <a:solidFill>
-                  <a:srgbClr val="1A202C"/>
-                </a:solidFill>
-                <a:latin typeface="Calibri" pitchFamily="34" charset="0"/>
-                <a:ea typeface="Calibri" pitchFamily="34" charset="-122"/>
-                <a:cs typeface="Calibri" pitchFamily="34" charset="-120"/>
-              </a:rPr>
-              <a:t>ADS &amp; Attestation de conformité</a:t>
+                  <a:srgbClr val="283A5E"/>
+                </a:solidFill>
+                <a:latin typeface="Calibri" pitchFamily="34" charset="0"/>
+                <a:ea typeface="Calibri" pitchFamily="34" charset="-122"/>
+                <a:cs typeface="Calibri" pitchFamily="34" charset="-120"/>
+              </a:rPr>
+              <a:t>ADS &amp; justificatif d'exploitation</a:t>
             </a:r>
             <a:endParaRPr lang="en-US" sz="950" dirty="0"/>
           </a:p>
@@ -5965,7 +5459,7 @@
                 <a:ea typeface="Calibri" pitchFamily="34" charset="-122"/>
                 <a:cs typeface="Calibri" pitchFamily="34" charset="-120"/>
               </a:rPr>
-              <a:t>Exploitation continue obligatoire. Retrait si &gt; 12 mois. Pas de bissage. Permis de circuler : hologramme, validité 1 an, signalement 3 jours.</a:t>
+              <a:t>Exploitation continue obligatoire. Retrait si &gt; 12 mois. Pas de bissage. Preuve par déclarations de revenus/avis d'imposition (permis de circuler annulé en 2024, sauf aéroport).</a:t>
             </a:r>
             <a:endParaRPr lang="en-US" sz="750" dirty="0"/>
           </a:p>
@@ -6032,7 +5526,7 @@
             <a:r>
               <a:rPr lang="en-US" sz="950" b="1" dirty="0">
                 <a:solidFill>
-                  <a:srgbClr val="1A202C"/>
+                  <a:srgbClr val="283A5E"/>
                 </a:solidFill>
                 <a:latin typeface="Calibri" pitchFamily="34" charset="0"/>
                 <a:ea typeface="Calibri" pitchFamily="34" charset="-122"/>
@@ -6144,7 +5638,7 @@
             <a:r>
               <a:rPr lang="en-US" sz="950" b="1" dirty="0">
                 <a:solidFill>
-                  <a:srgbClr val="1A202C"/>
+                  <a:srgbClr val="283A5E"/>
                 </a:solidFill>
                 <a:latin typeface="Calibri" pitchFamily="34" charset="0"/>
                 <a:ea typeface="Calibri" pitchFamily="34" charset="-122"/>
@@ -6189,29 +5683,7 @@
                 <a:ea typeface="Calibri" pitchFamily="34" charset="-122"/>
                 <a:cs typeface="Calibri" pitchFamily="34" charset="-120"/>
               </a:rPr>
-              <a:t>8 places max. Coffre 400L (300L faibles </a:t>
-            </a:r>
-            <a:r>
-              <a:rPr lang="en-US" sz="750" dirty="0" err="1">
-                <a:solidFill>
-                  <a:srgbClr val="4A5568"/>
-                </a:solidFill>
-                <a:latin typeface="Calibri" pitchFamily="34" charset="0"/>
-                <a:ea typeface="Calibri" pitchFamily="34" charset="-122"/>
-                <a:cs typeface="Calibri" pitchFamily="34" charset="-120"/>
-              </a:rPr>
-              <a:t>émissions</a:t>
-            </a:r>
-            <a:r>
-              <a:rPr lang="en-US" sz="750" dirty="0">
-                <a:solidFill>
-                  <a:srgbClr val="4A5568"/>
-                </a:solidFill>
-                <a:latin typeface="Calibri" pitchFamily="34" charset="0"/>
-                <a:ea typeface="Calibri" pitchFamily="34" charset="-122"/>
-                <a:cs typeface="Calibri" pitchFamily="34" charset="-120"/>
-              </a:rPr>
-              <a:t>). Covering soumis à autorisation.</a:t>
+              <a:t>8 places max. Coffre 400L (300L faibles émissions). CRIT'AIR 2. Covering soumis à autorisation.</a:t>
             </a:r>
             <a:endParaRPr lang="en-US" sz="750" dirty="0"/>
           </a:p>
@@ -6278,7 +5750,7 @@
             <a:r>
               <a:rPr lang="en-US" sz="950" b="1" dirty="0">
                 <a:solidFill>
-                  <a:srgbClr val="1A202C"/>
+                  <a:srgbClr val="283A5E"/>
                 </a:solidFill>
                 <a:latin typeface="Calibri" pitchFamily="34" charset="0"/>
                 <a:ea typeface="Calibri" pitchFamily="34" charset="-122"/>
@@ -6311,14 +5783,9 @@
           <a:bodyPr wrap="square" lIns="0" tIns="0" rIns="0" bIns="0" rtlCol="0" anchor="ctr"/>
           <a:lstStyle/>
           <a:p>
-            <a:r>
-              <a:rPr lang="fr-FR" sz="800" dirty="0"/>
-              <a:t>Lorsqu'un taxi est immobilisé en raison d'une réparation du véhicule ou de ses équipements spécifiques, ou en cas de vol, il est possible de le remplacer temporairement par un </a:t>
-            </a:r>
-            <a:r>
-              <a:rPr lang="fr-FR" sz="800" b="1" dirty="0"/>
-              <a:t>véhicule de substitution appelé taxi-relais</a:t>
-            </a:r>
+            <a:pPr marL="0" indent="0">
+              <a:buNone/>
+            </a:pPr>
             <a:r>
               <a:rPr lang="en-US" sz="750" dirty="0">
                 <a:solidFill>
@@ -6328,27 +5795,7 @@
                 <a:ea typeface="Calibri" pitchFamily="34" charset="-122"/>
                 <a:cs typeface="Calibri" pitchFamily="34" charset="-120"/>
               </a:rPr>
-              <a:t>. </a:t>
-            </a:r>
-            <a:r>
-              <a:rPr lang="fr-FR" sz="800" dirty="0"/>
-              <a:t>La gestion des taxis-relais relève de la </a:t>
-            </a:r>
-            <a:r>
-              <a:rPr lang="fr-FR" sz="800" b="1" dirty="0"/>
-              <a:t>compétence préfectorale</a:t>
-            </a:r>
-            <a:r>
-              <a:rPr lang="fr-FR" sz="800" dirty="0"/>
-              <a:t> : la déclaration s'effectue exclusivement en ligne sur le site officiel </a:t>
-            </a:r>
-            <a:r>
-              <a:rPr lang="fr-FR" sz="800" b="1" dirty="0"/>
-              <a:t>mesads.beta.gouv.fr</a:t>
-            </a:r>
-            <a:r>
-              <a:rPr lang="fr-FR" sz="800" dirty="0"/>
-              <a:t>.</a:t>
+              <a:t>Max 26 véhicules / 4 par bénéficiaire : dispositif annulé (CAA 19/01/2024), sans valeur juridique. Inscription liste d'attente 1 an renouvelable. Droits de stationnement obligatoires.</a:t>
             </a:r>
             <a:endParaRPr lang="en-US" sz="750" dirty="0"/>
           </a:p>
@@ -6369,7 +5816,7 @@
             <a:avLst/>
           </a:prstGeom>
           <a:solidFill>
-            <a:srgbClr val="F2F2F2"/>
+            <a:srgbClr val="1E2A3A"/>
           </a:solidFill>
           <a:ln/>
         </p:spPr>
@@ -6447,7 +5894,7 @@
             <a:r>
               <a:rPr lang="en-US" sz="800" b="1" dirty="0">
                 <a:solidFill>
-                  <a:srgbClr val="1A202C"/>
+                  <a:srgbClr val="FFFFFF"/>
                 </a:solidFill>
                 <a:latin typeface="Calibri" pitchFamily="34" charset="0"/>
                 <a:ea typeface="Calibri" pitchFamily="34" charset="-122"/>
@@ -6456,57 +5903,6 @@
               <a:t>13</a:t>
             </a:r>
             <a:endParaRPr lang="en-US" sz="800" dirty="0"/>
-          </a:p>
-        </p:txBody>
-      </p:sp>
-      <p:sp>
-        <p:nvSpPr>
-          <p:cNvPr id="32" name="Rectangle 31"/>
-          <p:cNvSpPr/>
-          <p:nvPr/>
-        </p:nvSpPr>
-        <p:spPr>
-          <a:xfrm>
-            <a:off x="0" y="0"/>
-            <a:ext cx="9144000" cy="251999"/>
-          </a:xfrm>
-          <a:prstGeom prst="rect">
-            <a:avLst/>
-          </a:prstGeom>
-          <a:solidFill>
-            <a:srgbClr val="F2F2F2"/>
-          </a:solidFill>
-          <a:ln>
-            <a:noFill/>
-          </a:ln>
-        </p:spPr>
-        <p:style>
-          <a:lnRef idx="1">
-            <a:schemeClr val="accent1"/>
-          </a:lnRef>
-          <a:fillRef idx="3">
-            <a:schemeClr val="accent1"/>
-          </a:fillRef>
-          <a:effectRef idx="2">
-            <a:schemeClr val="accent1"/>
-          </a:effectRef>
-          <a:fontRef idx="minor">
-            <a:schemeClr val="lt1"/>
-          </a:fontRef>
-        </p:style>
-        <p:txBody>
-          <a:bodyPr wrap="square" rtlCol="0" anchor="ctr"/>
-          <a:lstStyle/>
-          <a:p>
-            <a:pPr algn="ctr"/>
-            <a:r>
-              <a:rPr sz="1000" b="1">
-                <a:solidFill>
-                  <a:srgbClr val="1A202C"/>
-                </a:solidFill>
-              </a:rPr>
-              <a:t>ÉPREUVE RÉGLEMENTATION LOCALE — Partie 2 sur 3</a:t>
-            </a:r>
           </a:p>
         </p:txBody>
       </p:sp>
@@ -6524,7 +5920,7 @@
     <p:bg>
       <p:bgPr>
         <a:solidFill>
-          <a:srgbClr val="F2F2F2"/>
+          <a:srgbClr val="1E2A3A"/>
         </a:solidFill>
         <a:effectLst/>
       </p:bgPr>
@@ -6609,7 +6005,7 @@
             <a:r>
               <a:rPr lang="en-US" sz="3600" b="1" dirty="0">
                 <a:solidFill>
-                  <a:srgbClr val="1A202C"/>
+                  <a:srgbClr val="FFFFFF"/>
                 </a:solidFill>
                 <a:latin typeface="Georgia" pitchFamily="34" charset="0"/>
                 <a:ea typeface="Georgia" pitchFamily="34" charset="-122"/>
@@ -6648,7 +6044,7 @@
             <a:r>
               <a:rPr lang="en-US" sz="1400" i="1" dirty="0">
                 <a:solidFill>
-                  <a:srgbClr val="1A202C"/>
+                  <a:srgbClr val="D4A843"/>
                 </a:solidFill>
                 <a:latin typeface="Calibri" pitchFamily="34" charset="0"/>
                 <a:ea typeface="Calibri" pitchFamily="34" charset="-122"/>
@@ -6675,7 +6071,7 @@
             <a:avLst/>
           </a:prstGeom>
           <a:solidFill>
-            <a:srgbClr val="E8E8E8"/>
+            <a:srgbClr val="D4A843"/>
           </a:solidFill>
           <a:ln/>
         </p:spPr>
@@ -6717,7 +6113,7 @@
             <a:r>
               <a:rPr lang="en-US" sz="1100" b="1" dirty="0">
                 <a:solidFill>
-                  <a:srgbClr val="1A202C"/>
+                  <a:srgbClr val="FFFFFF"/>
                 </a:solidFill>
                 <a:latin typeface="Calibri" pitchFamily="34" charset="0"/>
                 <a:ea typeface="Calibri" pitchFamily="34" charset="-122"/>
@@ -6758,7 +6154,7 @@
             <a:r>
               <a:rPr lang="en-US" sz="1100" b="1" dirty="0">
                 <a:solidFill>
-                  <a:srgbClr val="1A202C"/>
+                  <a:srgbClr val="FFFFFF"/>
                 </a:solidFill>
                 <a:latin typeface="Calibri" pitchFamily="34" charset="0"/>
                 <a:ea typeface="Calibri" pitchFamily="34" charset="-122"/>
@@ -6784,7 +6180,7 @@
                 <a:ea typeface="Calibri" pitchFamily="34" charset="-122"/>
                 <a:cs typeface="Calibri" pitchFamily="34" charset="-120"/>
               </a:rPr>
-              <a:t>Taximètre hors ZUPC · Affichette · Notes · IMC · ADS · Permis de circuler · Conducteur · Véhicule · Remplacement · Listes d'attente</a:t>
+              <a:t>Taximètre hors ZUPC · Affichette · Notes · IMC · ADS · Justificatif d'exploitation · Conducteur · Véhicule · Remplacement · Listes d'attente</a:t>
             </a:r>
             <a:endParaRPr lang="en-US" sz="1100" dirty="0"/>
           </a:p>
@@ -6826,57 +6222,6 @@
               <a:t>FTRANSPORT - SERVICES PRO  •  Formation certifiée Qualiopi  •  Éligible CPF  •  Lyon</a:t>
             </a:r>
             <a:endParaRPr lang="en-US" sz="750" dirty="0"/>
-          </a:p>
-        </p:txBody>
-      </p:sp>
-      <p:sp>
-        <p:nvSpPr>
-          <p:cNvPr id="8" name="Rectangle 7"/>
-          <p:cNvSpPr/>
-          <p:nvPr/>
-        </p:nvSpPr>
-        <p:spPr>
-          <a:xfrm>
-            <a:off x="0" y="0"/>
-            <a:ext cx="9144000" cy="251999"/>
-          </a:xfrm>
-          <a:prstGeom prst="rect">
-            <a:avLst/>
-          </a:prstGeom>
-          <a:solidFill>
-            <a:srgbClr val="F2F2F2"/>
-          </a:solidFill>
-          <a:ln>
-            <a:noFill/>
-          </a:ln>
-        </p:spPr>
-        <p:style>
-          <a:lnRef idx="1">
-            <a:schemeClr val="accent1"/>
-          </a:lnRef>
-          <a:fillRef idx="3">
-            <a:schemeClr val="accent1"/>
-          </a:fillRef>
-          <a:effectRef idx="2">
-            <a:schemeClr val="accent1"/>
-          </a:effectRef>
-          <a:fontRef idx="minor">
-            <a:schemeClr val="lt1"/>
-          </a:fontRef>
-        </p:style>
-        <p:txBody>
-          <a:bodyPr wrap="square" rtlCol="0" anchor="ctr"/>
-          <a:lstStyle/>
-          <a:p>
-            <a:pPr algn="ctr"/>
-            <a:r>
-              <a:rPr sz="1000" b="1">
-                <a:solidFill>
-                  <a:srgbClr val="1A202C"/>
-                </a:solidFill>
-              </a:rPr>
-              <a:t>ÉPREUVE RÉGLEMENTATION LOCALE — Partie 2 sur 3</a:t>
-            </a:r>
           </a:p>
         </p:txBody>
       </p:sp>
@@ -6894,7 +6239,7 @@
     <p:bg>
       <p:bgPr>
         <a:solidFill>
-          <a:srgbClr val="F2F2F2"/>
+          <a:srgbClr val="F7F8FA"/>
         </a:solidFill>
         <a:effectLst/>
       </p:bgPr>
@@ -6985,7 +6330,7 @@
                 <a:ea typeface="Calibri" pitchFamily="34" charset="-122"/>
                 <a:cs typeface="Calibri" pitchFamily="34" charset="-120"/>
               </a:rPr>
-              <a:t>Taximètre · Affichette · Notes · IMC · ADS · Permis de circuler · Conducteur · Véhicule · Remplacement · Listes d'attente</a:t>
+              <a:t>Taximètre · Affichette · Notes · IMC · ADS · Justificatif d'exploitation · Conducteur · Véhicule · Remplacement · Listes d'attente</a:t>
             </a:r>
             <a:endParaRPr lang="en-US" sz="800" dirty="0"/>
           </a:p>
@@ -7006,7 +6351,7 @@
             <a:avLst/>
           </a:prstGeom>
           <a:solidFill>
-            <a:srgbClr val="F2F2F2"/>
+            <a:srgbClr val="283A5E"/>
           </a:solidFill>
           <a:ln/>
         </p:spPr>
@@ -7045,7 +6390,7 @@
             <a:r>
               <a:rPr lang="en-US" sz="1300" b="1" dirty="0">
                 <a:solidFill>
-                  <a:srgbClr val="1A202C"/>
+                  <a:srgbClr val="FFFFFF"/>
                 </a:solidFill>
                 <a:latin typeface="Calibri" pitchFamily="34" charset="0"/>
                 <a:ea typeface="Calibri" pitchFamily="34" charset="-122"/>
@@ -7152,7 +6497,7 @@
           <a:noFill/>
           <a:ln w="6350">
             <a:solidFill>
-              <a:srgbClr val="F0F0F0"/>
+              <a:srgbClr val="E2E8F0"/>
             </a:solidFill>
             <a:prstDash val="solid"/>
           </a:ln>
@@ -7180,7 +6525,7 @@
             <a:avLst/>
           </a:prstGeom>
           <a:solidFill>
-            <a:srgbClr val="F2F2F2"/>
+            <a:srgbClr val="283A5E"/>
           </a:solidFill>
           <a:ln/>
         </p:spPr>
@@ -7219,7 +6564,7 @@
             <a:r>
               <a:rPr lang="en-US" sz="1300" b="1" dirty="0">
                 <a:solidFill>
-                  <a:srgbClr val="1A202C"/>
+                  <a:srgbClr val="FFFFFF"/>
                 </a:solidFill>
                 <a:latin typeface="Calibri" pitchFamily="34" charset="0"/>
                 <a:ea typeface="Calibri" pitchFamily="34" charset="-122"/>
@@ -7326,7 +6671,7 @@
           <a:noFill/>
           <a:ln w="6350">
             <a:solidFill>
-              <a:srgbClr val="F0F0F0"/>
+              <a:srgbClr val="E2E8F0"/>
             </a:solidFill>
             <a:prstDash val="solid"/>
           </a:ln>
@@ -7354,7 +6699,7 @@
             <a:avLst/>
           </a:prstGeom>
           <a:solidFill>
-            <a:srgbClr val="F2F2F2"/>
+            <a:srgbClr val="283A5E"/>
           </a:solidFill>
           <a:ln/>
         </p:spPr>
@@ -7393,7 +6738,7 @@
             <a:r>
               <a:rPr lang="en-US" sz="1300" b="1" dirty="0">
                 <a:solidFill>
-                  <a:srgbClr val="1A202C"/>
+                  <a:srgbClr val="FFFFFF"/>
                 </a:solidFill>
                 <a:latin typeface="Calibri" pitchFamily="34" charset="0"/>
                 <a:ea typeface="Calibri" pitchFamily="34" charset="-122"/>
@@ -7500,7 +6845,7 @@
           <a:noFill/>
           <a:ln w="6350">
             <a:solidFill>
-              <a:srgbClr val="F0F0F0"/>
+              <a:srgbClr val="E2E8F0"/>
             </a:solidFill>
             <a:prstDash val="solid"/>
           </a:ln>
@@ -7528,7 +6873,7 @@
             <a:avLst/>
           </a:prstGeom>
           <a:solidFill>
-            <a:srgbClr val="F2F2F2"/>
+            <a:srgbClr val="283A5E"/>
           </a:solidFill>
           <a:ln/>
         </p:spPr>
@@ -7567,7 +6912,7 @@
             <a:r>
               <a:rPr lang="en-US" sz="1300" b="1" dirty="0">
                 <a:solidFill>
-                  <a:srgbClr val="1A202C"/>
+                  <a:srgbClr val="FFFFFF"/>
                 </a:solidFill>
                 <a:latin typeface="Calibri" pitchFamily="34" charset="0"/>
                 <a:ea typeface="Calibri" pitchFamily="34" charset="-122"/>
@@ -7674,7 +7019,7 @@
           <a:noFill/>
           <a:ln w="6350">
             <a:solidFill>
-              <a:srgbClr val="F0F0F0"/>
+              <a:srgbClr val="E2E8F0"/>
             </a:solidFill>
             <a:prstDash val="solid"/>
           </a:ln>
@@ -7702,7 +7047,7 @@
             <a:avLst/>
           </a:prstGeom>
           <a:solidFill>
-            <a:srgbClr val="F2F2F2"/>
+            <a:srgbClr val="283A5E"/>
           </a:solidFill>
           <a:ln/>
         </p:spPr>
@@ -7741,7 +7086,7 @@
             <a:r>
               <a:rPr lang="en-US" sz="1300" b="1" dirty="0">
                 <a:solidFill>
-                  <a:srgbClr val="1A202C"/>
+                  <a:srgbClr val="FFFFFF"/>
                 </a:solidFill>
                 <a:latin typeface="Calibri" pitchFamily="34" charset="0"/>
                 <a:ea typeface="Calibri" pitchFamily="34" charset="-122"/>
@@ -7786,7 +7131,7 @@
                 <a:ea typeface="Calibri" pitchFamily="34" charset="-122"/>
                 <a:cs typeface="Calibri" pitchFamily="34" charset="-120"/>
               </a:rPr>
-              <a:t>Attestation de conformité &amp; obligations titulaire</a:t>
+              <a:t>Justificatif d'exploitation &amp; obligations titulaire</a:t>
             </a:r>
             <a:endParaRPr lang="en-US" sz="1100" dirty="0"/>
           </a:p>
@@ -7825,7 +7170,7 @@
                 <a:ea typeface="Calibri" pitchFamily="34" charset="-122"/>
                 <a:cs typeface="Calibri" pitchFamily="34" charset="-120"/>
               </a:rPr>
-              <a:t>Hologramme · Validité 1 an · Signalement 3 jours · Incident d'exploitation</a:t>
+              <a:t>Déclarations fiscales/avis d'imposition · Exception aéroport · Contrôle Métropole/Préfet</a:t>
             </a:r>
             <a:endParaRPr lang="en-US" sz="800" dirty="0"/>
           </a:p>
@@ -7848,7 +7193,7 @@
           <a:noFill/>
           <a:ln w="6350">
             <a:solidFill>
-              <a:srgbClr val="F0F0F0"/>
+              <a:srgbClr val="E2E8F0"/>
             </a:solidFill>
             <a:prstDash val="solid"/>
           </a:ln>
@@ -7876,7 +7221,7 @@
             <a:avLst/>
           </a:prstGeom>
           <a:solidFill>
-            <a:srgbClr val="F2F2F2"/>
+            <a:srgbClr val="283A5E"/>
           </a:solidFill>
           <a:ln/>
         </p:spPr>
@@ -7915,7 +7260,7 @@
             <a:r>
               <a:rPr lang="en-US" sz="1300" b="1" dirty="0">
                 <a:solidFill>
-                  <a:srgbClr val="1A202C"/>
+                  <a:srgbClr val="FFFFFF"/>
                 </a:solidFill>
                 <a:latin typeface="Calibri" pitchFamily="34" charset="0"/>
                 <a:ea typeface="Calibri" pitchFamily="34" charset="-122"/>
@@ -8022,7 +7367,7 @@
           <a:noFill/>
           <a:ln w="6350">
             <a:solidFill>
-              <a:srgbClr val="F0F0F0"/>
+              <a:srgbClr val="E2E8F0"/>
             </a:solidFill>
             <a:prstDash val="solid"/>
           </a:ln>
@@ -8050,7 +7395,7 @@
             <a:avLst/>
           </a:prstGeom>
           <a:solidFill>
-            <a:srgbClr val="F2F2F2"/>
+            <a:srgbClr val="283A5E"/>
           </a:solidFill>
           <a:ln/>
         </p:spPr>
@@ -8089,7 +7434,7 @@
             <a:r>
               <a:rPr lang="en-US" sz="1300" b="1" dirty="0">
                 <a:solidFill>
-                  <a:srgbClr val="1A202C"/>
+                  <a:srgbClr val="FFFFFF"/>
                 </a:solidFill>
                 <a:latin typeface="Calibri" pitchFamily="34" charset="0"/>
                 <a:ea typeface="Calibri" pitchFamily="34" charset="-122"/>
@@ -8134,7 +7479,7 @@
                 <a:ea typeface="Calibri" pitchFamily="34" charset="-122"/>
                 <a:cs typeface="Calibri" pitchFamily="34" charset="-120"/>
               </a:rPr>
-              <a:t>Remplacement, listes d'attente &amp; droits de stationnement</a:t>
+              <a:t>Véhicules de remplacement (annulé), listes d'attente &amp; droits de stationnement</a:t>
             </a:r>
             <a:endParaRPr lang="en-US" sz="1100" dirty="0"/>
           </a:p>
@@ -8173,7 +7518,7 @@
                 <a:ea typeface="Calibri" pitchFamily="34" charset="-122"/>
                 <a:cs typeface="Calibri" pitchFamily="34" charset="-120"/>
               </a:rPr>
-              <a:t>10 ADS / 50 affiliés / 150 adhérents · Max 26 véhicules · Inscription · Renouvellement · Droits</a:t>
+              <a:t>Dispositif annulé CAA 19/01/2024 · Inscription · Renouvellement · Droits</a:t>
             </a:r>
             <a:endParaRPr lang="en-US" sz="800" dirty="0"/>
           </a:p>
@@ -8194,7 +7539,7 @@
             <a:avLst/>
           </a:prstGeom>
           <a:solidFill>
-            <a:srgbClr val="F2F2F2"/>
+            <a:srgbClr val="1E2A3A"/>
           </a:solidFill>
           <a:ln/>
         </p:spPr>
@@ -8272,7 +7617,7 @@
             <a:r>
               <a:rPr lang="en-US" sz="800" b="1" dirty="0">
                 <a:solidFill>
-                  <a:srgbClr val="1A202C"/>
+                  <a:srgbClr val="FFFFFF"/>
                 </a:solidFill>
                 <a:latin typeface="Calibri" pitchFamily="34" charset="0"/>
                 <a:ea typeface="Calibri" pitchFamily="34" charset="-122"/>
@@ -8281,57 +7626,6 @@
               <a:t>2</a:t>
             </a:r>
             <a:endParaRPr lang="en-US" sz="800" dirty="0"/>
-          </a:p>
-        </p:txBody>
-      </p:sp>
-      <p:sp>
-        <p:nvSpPr>
-          <p:cNvPr id="41" name="Rectangle 40"/>
-          <p:cNvSpPr/>
-          <p:nvPr/>
-        </p:nvSpPr>
-        <p:spPr>
-          <a:xfrm>
-            <a:off x="0" y="0"/>
-            <a:ext cx="9144000" cy="251999"/>
-          </a:xfrm>
-          <a:prstGeom prst="rect">
-            <a:avLst/>
-          </a:prstGeom>
-          <a:solidFill>
-            <a:srgbClr val="F2F2F2"/>
-          </a:solidFill>
-          <a:ln>
-            <a:noFill/>
-          </a:ln>
-        </p:spPr>
-        <p:style>
-          <a:lnRef idx="1">
-            <a:schemeClr val="accent1"/>
-          </a:lnRef>
-          <a:fillRef idx="3">
-            <a:schemeClr val="accent1"/>
-          </a:fillRef>
-          <a:effectRef idx="2">
-            <a:schemeClr val="accent1"/>
-          </a:effectRef>
-          <a:fontRef idx="minor">
-            <a:schemeClr val="lt1"/>
-          </a:fontRef>
-        </p:style>
-        <p:txBody>
-          <a:bodyPr wrap="square" rtlCol="0" anchor="ctr"/>
-          <a:lstStyle/>
-          <a:p>
-            <a:pPr algn="ctr"/>
-            <a:r>
-              <a:rPr sz="1000" b="1">
-                <a:solidFill>
-                  <a:srgbClr val="1A202C"/>
-                </a:solidFill>
-              </a:rPr>
-              <a:t>ÉPREUVE RÉGLEMENTATION LOCALE — Partie 2 sur 3</a:t>
-            </a:r>
           </a:p>
         </p:txBody>
       </p:sp>
@@ -8349,7 +7643,7 @@
     <p:bg>
       <p:bgPr>
         <a:solidFill>
-          <a:srgbClr val="F2F2F2"/>
+          <a:srgbClr val="F7F8FA"/>
         </a:solidFill>
         <a:effectLst/>
       </p:bgPr>
@@ -8383,7 +7677,7 @@
             <a:avLst/>
           </a:prstGeom>
           <a:solidFill>
-            <a:srgbClr val="F2F2F2"/>
+            <a:srgbClr val="283A5E"/>
           </a:solidFill>
           <a:ln/>
         </p:spPr>
@@ -8422,7 +7716,7 @@
             <a:r>
               <a:rPr lang="en-US" sz="900" b="1" kern="0" spc="200" dirty="0">
                 <a:solidFill>
-                  <a:srgbClr val="1A202C"/>
+                  <a:srgbClr val="D4A843"/>
                 </a:solidFill>
                 <a:latin typeface="Calibri" pitchFamily="34" charset="0"/>
                 <a:ea typeface="Calibri" pitchFamily="34" charset="-122"/>
@@ -8558,7 +7852,7 @@
             <a:r>
               <a:rPr lang="en-US" sz="1200" b="1" dirty="0">
                 <a:solidFill>
-                  <a:srgbClr val="1A202C"/>
+                  <a:srgbClr val="2B6CB0"/>
                 </a:solidFill>
                 <a:latin typeface="Calibri" pitchFamily="34" charset="0"/>
                 <a:ea typeface="Calibri" pitchFamily="34" charset="-122"/>
@@ -8603,7 +7897,7 @@
                 <a:ea typeface="Calibri" pitchFamily="34" charset="-122"/>
                 <a:cs typeface="Calibri" pitchFamily="34" charset="-120"/>
               </a:rPr>
-              <a:t>La mise en marche du taximètre peut se faire soit au passage (ou à équidistance) de la dernière station de la ZUPC, soit à la dernière station de la commune de rattachement du taxi.</a:t>
+              <a:t>Mise en marche taximètre : dernière station ZUPC (ou équidistance), ou dernière station commune de rattachement.</a:t>
             </a:r>
             <a:endParaRPr lang="en-US" sz="900" dirty="0"/>
           </a:p>
@@ -8624,7 +7918,7 @@
             <a:avLst/>
           </a:prstGeom>
           <a:solidFill>
-            <a:srgbClr val="F8F8F8"/>
+            <a:srgbClr val="EBF4FF"/>
           </a:solidFill>
           <a:ln/>
         </p:spPr>
@@ -8663,7 +7957,7 @@
             <a:r>
               <a:rPr lang="en-US" sz="850" b="1" dirty="0">
                 <a:solidFill>
-                  <a:srgbClr val="1A202C"/>
+                  <a:srgbClr val="283A5E"/>
                 </a:solidFill>
                 <a:latin typeface="Calibri" pitchFamily="34" charset="0"/>
                 <a:ea typeface="Calibri" pitchFamily="34" charset="-122"/>
@@ -8683,8 +7977,8 @@
         </p:nvSpPr>
         <p:spPr>
           <a:xfrm>
-            <a:off x="4663440" y="1051560"/>
-            <a:ext cx="4023360" cy="2811780"/>
+            <a:off x="4663440" y="1188720"/>
+            <a:ext cx="4023360" cy="2286000"/>
           </a:xfrm>
           <a:prstGeom prst="rect">
             <a:avLst/>
@@ -8760,7 +8054,7 @@
             <a:r>
               <a:rPr lang="en-US" sz="1200" b="1" dirty="0">
                 <a:solidFill>
-                  <a:srgbClr val="1A202C"/>
+                  <a:srgbClr val="C05621"/>
                 </a:solidFill>
                 <a:latin typeface="Calibri" pitchFamily="34" charset="0"/>
                 <a:ea typeface="Calibri" pitchFamily="34" charset="-122"/>
@@ -8787,7 +8081,7 @@
             <a:avLst/>
           </a:prstGeom>
           <a:solidFill>
-            <a:srgbClr val="EEEEEE"/>
+            <a:srgbClr val="C05621"/>
           </a:solidFill>
           <a:ln/>
         </p:spPr>
@@ -8826,7 +8120,7 @@
             <a:r>
               <a:rPr lang="en-US" sz="700" b="1" dirty="0">
                 <a:solidFill>
-                  <a:srgbClr val="1A202C"/>
+                  <a:srgbClr val="FFFFFF"/>
                 </a:solidFill>
                 <a:latin typeface="Calibri" pitchFamily="34" charset="0"/>
                 <a:ea typeface="Calibri" pitchFamily="34" charset="-122"/>
@@ -8892,7 +8186,7 @@
             <a:avLst/>
           </a:prstGeom>
           <a:solidFill>
-            <a:srgbClr val="EEEEEE"/>
+            <a:srgbClr val="C05621"/>
           </a:solidFill>
           <a:ln/>
         </p:spPr>
@@ -8931,7 +8225,7 @@
             <a:r>
               <a:rPr lang="en-US" sz="700" b="1" dirty="0">
                 <a:solidFill>
-                  <a:srgbClr val="1A202C"/>
+                  <a:srgbClr val="FFFFFF"/>
                 </a:solidFill>
                 <a:latin typeface="Calibri" pitchFamily="34" charset="0"/>
                 <a:ea typeface="Calibri" pitchFamily="34" charset="-122"/>
@@ -8997,7 +8291,7 @@
             <a:avLst/>
           </a:prstGeom>
           <a:solidFill>
-            <a:srgbClr val="EEEEEE"/>
+            <a:srgbClr val="C05621"/>
           </a:solidFill>
           <a:ln/>
         </p:spPr>
@@ -9036,7 +8330,7 @@
             <a:r>
               <a:rPr lang="en-US" sz="700" b="1" dirty="0">
                 <a:solidFill>
-                  <a:srgbClr val="1A202C"/>
+                  <a:srgbClr val="FFFFFF"/>
                 </a:solidFill>
                 <a:latin typeface="Calibri" pitchFamily="34" charset="0"/>
                 <a:ea typeface="Calibri" pitchFamily="34" charset="-122"/>
@@ -9102,7 +8396,7 @@
             <a:avLst/>
           </a:prstGeom>
           <a:solidFill>
-            <a:srgbClr val="EEEEEE"/>
+            <a:srgbClr val="C05621"/>
           </a:solidFill>
           <a:ln/>
         </p:spPr>
@@ -9141,7 +8435,7 @@
             <a:r>
               <a:rPr lang="en-US" sz="700" b="1" dirty="0">
                 <a:solidFill>
-                  <a:srgbClr val="1A202C"/>
+                  <a:srgbClr val="FFFFFF"/>
                 </a:solidFill>
                 <a:latin typeface="Calibri" pitchFamily="34" charset="0"/>
                 <a:ea typeface="Calibri" pitchFamily="34" charset="-122"/>
@@ -9207,7 +8501,7 @@
             <a:avLst/>
           </a:prstGeom>
           <a:solidFill>
-            <a:srgbClr val="EEEEEE"/>
+            <a:srgbClr val="C05621"/>
           </a:solidFill>
           <a:ln/>
         </p:spPr>
@@ -9246,7 +8540,7 @@
             <a:r>
               <a:rPr lang="en-US" sz="700" b="1" dirty="0">
                 <a:solidFill>
-                  <a:srgbClr val="1A202C"/>
+                  <a:srgbClr val="FFFFFF"/>
                 </a:solidFill>
                 <a:latin typeface="Calibri" pitchFamily="34" charset="0"/>
                 <a:ea typeface="Calibri" pitchFamily="34" charset="-122"/>
@@ -9312,7 +8606,7 @@
             <a:avLst/>
           </a:prstGeom>
           <a:solidFill>
-            <a:srgbClr val="EEEEEE"/>
+            <a:srgbClr val="C05621"/>
           </a:solidFill>
           <a:ln/>
         </p:spPr>
@@ -9351,7 +8645,7 @@
             <a:r>
               <a:rPr lang="en-US" sz="700" b="1" dirty="0">
                 <a:solidFill>
-                  <a:srgbClr val="1A202C"/>
+                  <a:srgbClr val="FFFFFF"/>
                 </a:solidFill>
                 <a:latin typeface="Calibri" pitchFamily="34" charset="0"/>
                 <a:ea typeface="Calibri" pitchFamily="34" charset="-122"/>
@@ -9417,7 +8711,7 @@
             <a:avLst/>
           </a:prstGeom>
           <a:solidFill>
-            <a:srgbClr val="F2F2F2"/>
+            <a:srgbClr val="1E2A3A"/>
           </a:solidFill>
           <a:ln/>
         </p:spPr>
@@ -9495,7 +8789,7 @@
             <a:r>
               <a:rPr lang="en-US" sz="800" b="1" dirty="0">
                 <a:solidFill>
-                  <a:srgbClr val="1A202C"/>
+                  <a:srgbClr val="FFFFFF"/>
                 </a:solidFill>
                 <a:latin typeface="Calibri" pitchFamily="34" charset="0"/>
                 <a:ea typeface="Calibri" pitchFamily="34" charset="-122"/>
@@ -9504,57 +8798,6 @@
               <a:t>3</a:t>
             </a:r>
             <a:endParaRPr lang="en-US" sz="800" dirty="0"/>
-          </a:p>
-        </p:txBody>
-      </p:sp>
-      <p:sp>
-        <p:nvSpPr>
-          <p:cNvPr id="35" name="Rectangle 34"/>
-          <p:cNvSpPr/>
-          <p:nvPr/>
-        </p:nvSpPr>
-        <p:spPr>
-          <a:xfrm>
-            <a:off x="0" y="0"/>
-            <a:ext cx="9144000" cy="251999"/>
-          </a:xfrm>
-          <a:prstGeom prst="rect">
-            <a:avLst/>
-          </a:prstGeom>
-          <a:solidFill>
-            <a:srgbClr val="F2F2F2"/>
-          </a:solidFill>
-          <a:ln>
-            <a:noFill/>
-          </a:ln>
-        </p:spPr>
-        <p:style>
-          <a:lnRef idx="1">
-            <a:schemeClr val="accent1"/>
-          </a:lnRef>
-          <a:fillRef idx="3">
-            <a:schemeClr val="accent1"/>
-          </a:fillRef>
-          <a:effectRef idx="2">
-            <a:schemeClr val="accent1"/>
-          </a:effectRef>
-          <a:fontRef idx="minor">
-            <a:schemeClr val="lt1"/>
-          </a:fontRef>
-        </p:style>
-        <p:txBody>
-          <a:bodyPr wrap="square" rtlCol="0" anchor="ctr"/>
-          <a:lstStyle/>
-          <a:p>
-            <a:pPr algn="ctr"/>
-            <a:r>
-              <a:rPr sz="1000" b="1">
-                <a:solidFill>
-                  <a:srgbClr val="1A202C"/>
-                </a:solidFill>
-              </a:rPr>
-              <a:t>ÉPREUVE RÉGLEMENTATION LOCALE — Partie 2 sur 3</a:t>
-            </a:r>
           </a:p>
         </p:txBody>
       </p:sp>
@@ -9572,7 +8815,7 @@
     <p:bg>
       <p:bgPr>
         <a:solidFill>
-          <a:srgbClr val="F2F2F2"/>
+          <a:srgbClr val="F7F8FA"/>
         </a:solidFill>
         <a:effectLst/>
       </p:bgPr>
@@ -9606,7 +8849,7 @@
             <a:avLst/>
           </a:prstGeom>
           <a:solidFill>
-            <a:srgbClr val="F2F2F2"/>
+            <a:srgbClr val="283A5E"/>
           </a:solidFill>
           <a:ln/>
         </p:spPr>
@@ -9645,7 +8888,7 @@
             <a:r>
               <a:rPr lang="en-US" sz="900" b="1" kern="0" spc="200" dirty="0">
                 <a:solidFill>
-                  <a:srgbClr val="1A202C"/>
+                  <a:srgbClr val="D4A843"/>
                 </a:solidFill>
                 <a:latin typeface="Calibri" pitchFamily="34" charset="0"/>
                 <a:ea typeface="Calibri" pitchFamily="34" charset="-122"/>
@@ -9745,7 +8988,7 @@
             <a:avLst/>
           </a:prstGeom>
           <a:solidFill>
-            <a:srgbClr val="EEEEEE"/>
+            <a:srgbClr val="2B6CB0"/>
           </a:solidFill>
           <a:ln/>
         </p:spPr>
@@ -9784,7 +9027,7 @@
             <a:r>
               <a:rPr lang="en-US" sz="1000" b="1" dirty="0">
                 <a:solidFill>
-                  <a:srgbClr val="1A202C"/>
+                  <a:srgbClr val="FFFFFF"/>
                 </a:solidFill>
                 <a:latin typeface="Calibri" pitchFamily="34" charset="0"/>
                 <a:ea typeface="Calibri" pitchFamily="34" charset="-122"/>
@@ -10013,7 +9256,7 @@
             <a:avLst/>
           </a:prstGeom>
           <a:solidFill>
-            <a:srgbClr val="EEEEEE"/>
+            <a:srgbClr val="276749"/>
           </a:solidFill>
           <a:ln/>
         </p:spPr>
@@ -10052,7 +9295,7 @@
             <a:r>
               <a:rPr lang="en-US" sz="1000" b="1" dirty="0">
                 <a:solidFill>
-                  <a:srgbClr val="1A202C"/>
+                  <a:srgbClr val="FFFFFF"/>
                 </a:solidFill>
                 <a:latin typeface="Calibri" pitchFamily="34" charset="0"/>
                 <a:ea typeface="Calibri" pitchFamily="34" charset="-122"/>
@@ -10218,7 +9461,7 @@
             <a:avLst/>
           </a:prstGeom>
           <a:solidFill>
-            <a:srgbClr val="EEEEEE"/>
+            <a:srgbClr val="C05621"/>
           </a:solidFill>
           <a:ln/>
         </p:spPr>
@@ -10257,7 +9500,7 @@
             <a:r>
               <a:rPr lang="en-US" sz="1000" b="1" dirty="0">
                 <a:solidFill>
-                  <a:srgbClr val="1A202C"/>
+                  <a:srgbClr val="FFFFFF"/>
                 </a:solidFill>
                 <a:latin typeface="Calibri" pitchFamily="34" charset="0"/>
                 <a:ea typeface="Calibri" pitchFamily="34" charset="-122"/>
@@ -10341,7 +9584,7 @@
             <a:r>
               <a:rPr lang="en-US" sz="850" b="1" dirty="0">
                 <a:solidFill>
-                  <a:srgbClr val="1A202C"/>
+                  <a:srgbClr val="C53030"/>
                 </a:solidFill>
                 <a:latin typeface="Calibri" pitchFamily="34" charset="0"/>
                 <a:ea typeface="Calibri" pitchFamily="34" charset="-122"/>
@@ -10404,7 +9647,7 @@
             <a:r>
               <a:rPr lang="en-US" sz="800" b="1" dirty="0">
                 <a:solidFill>
-                  <a:srgbClr val="1A202C"/>
+                  <a:srgbClr val="283A5E"/>
                 </a:solidFill>
                 <a:latin typeface="Calibri" pitchFamily="34" charset="0"/>
                 <a:ea typeface="Calibri" pitchFamily="34" charset="-122"/>
@@ -10431,7 +9674,7 @@
             <a:avLst/>
           </a:prstGeom>
           <a:solidFill>
-            <a:srgbClr val="F2F2F2"/>
+            <a:srgbClr val="1E2A3A"/>
           </a:solidFill>
           <a:ln/>
         </p:spPr>
@@ -10509,7 +9752,7 @@
             <a:r>
               <a:rPr lang="en-US" sz="800" b="1" dirty="0">
                 <a:solidFill>
-                  <a:srgbClr val="1A202C"/>
+                  <a:srgbClr val="FFFFFF"/>
                 </a:solidFill>
                 <a:latin typeface="Calibri" pitchFamily="34" charset="0"/>
                 <a:ea typeface="Calibri" pitchFamily="34" charset="-122"/>
@@ -10518,57 +9761,6 @@
               <a:t>4</a:t>
             </a:r>
             <a:endParaRPr lang="en-US" sz="800" dirty="0"/>
-          </a:p>
-        </p:txBody>
-      </p:sp>
-      <p:sp>
-        <p:nvSpPr>
-          <p:cNvPr id="20" name="Rectangle 19"/>
-          <p:cNvSpPr/>
-          <p:nvPr/>
-        </p:nvSpPr>
-        <p:spPr>
-          <a:xfrm>
-            <a:off x="0" y="0"/>
-            <a:ext cx="9144000" cy="251999"/>
-          </a:xfrm>
-          <a:prstGeom prst="rect">
-            <a:avLst/>
-          </a:prstGeom>
-          <a:solidFill>
-            <a:srgbClr val="F2F2F2"/>
-          </a:solidFill>
-          <a:ln>
-            <a:noFill/>
-          </a:ln>
-        </p:spPr>
-        <p:style>
-          <a:lnRef idx="1">
-            <a:schemeClr val="accent1"/>
-          </a:lnRef>
-          <a:fillRef idx="3">
-            <a:schemeClr val="accent1"/>
-          </a:fillRef>
-          <a:effectRef idx="2">
-            <a:schemeClr val="accent1"/>
-          </a:effectRef>
-          <a:fontRef idx="minor">
-            <a:schemeClr val="lt1"/>
-          </a:fontRef>
-        </p:style>
-        <p:txBody>
-          <a:bodyPr wrap="square" rtlCol="0" anchor="ctr"/>
-          <a:lstStyle/>
-          <a:p>
-            <a:pPr algn="ctr"/>
-            <a:r>
-              <a:rPr sz="1000" b="1">
-                <a:solidFill>
-                  <a:srgbClr val="1A202C"/>
-                </a:solidFill>
-              </a:rPr>
-              <a:t>ÉPREUVE RÉGLEMENTATION LOCALE — Partie 2 sur 3</a:t>
-            </a:r>
           </a:p>
         </p:txBody>
       </p:sp>
@@ -10586,7 +9778,7 @@
     <p:bg>
       <p:bgPr>
         <a:solidFill>
-          <a:srgbClr val="F2F2F2"/>
+          <a:srgbClr val="F7F8FA"/>
         </a:solidFill>
         <a:effectLst/>
       </p:bgPr>
@@ -10620,7 +9812,7 @@
             <a:avLst/>
           </a:prstGeom>
           <a:solidFill>
-            <a:srgbClr val="F2F2F2"/>
+            <a:srgbClr val="283A5E"/>
           </a:solidFill>
           <a:ln/>
         </p:spPr>
@@ -10659,7 +9851,7 @@
             <a:r>
               <a:rPr lang="en-US" sz="900" b="1" kern="0" spc="200" dirty="0">
                 <a:solidFill>
-                  <a:srgbClr val="1A202C"/>
+                  <a:srgbClr val="D4A843"/>
                 </a:solidFill>
                 <a:latin typeface="Calibri" pitchFamily="34" charset="0"/>
                 <a:ea typeface="Calibri" pitchFamily="34" charset="-122"/>
@@ -10795,7 +9987,7 @@
             <a:r>
               <a:rPr lang="en-US" sz="1200" b="1" dirty="0">
                 <a:solidFill>
-                  <a:srgbClr val="1A202C"/>
+                  <a:srgbClr val="0D9488"/>
                 </a:solidFill>
                 <a:latin typeface="Calibri" pitchFamily="34" charset="0"/>
                 <a:ea typeface="Calibri" pitchFamily="34" charset="-122"/>
@@ -10832,7 +10024,7 @@
               <a:buNone/>
             </a:pPr>
             <a:r>
-              <a:rPr lang="en-US" sz="900" b="1" dirty="0" err="1">
+              <a:rPr lang="en-US" sz="900" b="1" dirty="0">
                 <a:solidFill>
                   <a:srgbClr val="1A202C"/>
                 </a:solidFill>
@@ -10840,41 +10032,18 @@
                 <a:ea typeface="Calibri" pitchFamily="34" charset="-122"/>
                 <a:cs typeface="Calibri" pitchFamily="34" charset="-120"/>
               </a:rPr>
-              <a:t>Lettre</a:t>
-            </a:r>
+              <a:t>Lettre L verte sur cadran taximètre après adaptation tarifs 2026 (arrêté 19/02/2026).</a:t>
+            </a:r>
+            <a:endParaRPr lang="en-US" sz="900" dirty="0"/>
+          </a:p>
+          <a:p>
+            <a:pPr marL="0" indent="0">
+              <a:buNone/>
+            </a:pPr>
             <a:r>
               <a:rPr lang="en-US" sz="900" b="1" dirty="0">
                 <a:solidFill>
-                  <a:srgbClr val="1A202C"/>
-                </a:solidFill>
-                <a:latin typeface="Calibri" pitchFamily="34" charset="0"/>
-                <a:ea typeface="Calibri" pitchFamily="34" charset="-122"/>
-                <a:cs typeface="Calibri" pitchFamily="34" charset="-120"/>
-              </a:rPr>
-              <a:t> L de couleur verte </a:t>
-            </a:r>
-            <a:r>
-              <a:rPr lang="en-US" sz="850" dirty="0">
-                <a:solidFill>
-                  <a:srgbClr val="4A5568"/>
-                </a:solidFill>
-                <a:latin typeface="Calibri" pitchFamily="34" charset="0"/>
-                <a:ea typeface="Calibri" pitchFamily="34" charset="-122"/>
-                <a:cs typeface="Calibri" pitchFamily="34" charset="-120"/>
-              </a:rPr>
-              <a:t>apposée sur le cadran du taximètre après adaptation aux tarifs.
-</a:t>
-            </a:r>
-            <a:endParaRPr lang="en-US" sz="900" dirty="0"/>
-          </a:p>
-          <a:p>
-            <a:pPr marL="0" indent="0">
-              <a:buNone/>
-            </a:pPr>
-            <a:r>
-              <a:rPr lang="en-US" sz="900" b="1" dirty="0">
-                <a:solidFill>
-                  <a:srgbClr val="1A202C"/>
+                  <a:srgbClr val="C53030"/>
                 </a:solidFill>
                 <a:latin typeface="Calibri" pitchFamily="34" charset="0"/>
                 <a:ea typeface="Calibri" pitchFamily="34" charset="-122"/>
@@ -10909,18 +10078,7 @@
                 <a:ea typeface="Calibri" pitchFamily="34" charset="-122"/>
                 <a:cs typeface="Calibri" pitchFamily="34" charset="-120"/>
               </a:rPr>
-              <a:t>Entre-temps : </a:t>
-            </a:r>
-            <a:r>
-              <a:rPr lang="en-US" sz="850" dirty="0">
-                <a:solidFill>
-                  <a:srgbClr val="4A5568"/>
-                </a:solidFill>
-                <a:latin typeface="Calibri" pitchFamily="34" charset="0"/>
-                <a:ea typeface="Calibri" pitchFamily="34" charset="-122"/>
-                <a:cs typeface="Calibri" pitchFamily="34" charset="-120"/>
-              </a:rPr>
-              <a:t>hausse ne pouvant excéder la variation du tarif de la course-type, appliquée au montant affiché (hors supplément) via un tableau de correspondance.
+              <a:t>Entre-temps : hausse plafonnée à la variation du tarif course-type, via tableau de correspondance (hors supplément).
 </a:t>
             </a:r>
             <a:endParaRPr lang="en-US" sz="900" dirty="0"/>
@@ -10932,7 +10090,7 @@
             <a:r>
               <a:rPr lang="en-US" sz="850" b="1" dirty="0">
                 <a:solidFill>
-                  <a:srgbClr val="1A202C"/>
+                  <a:srgbClr val="283A5E"/>
                 </a:solidFill>
                 <a:latin typeface="Calibri" pitchFamily="34" charset="0"/>
                 <a:ea typeface="Calibri" pitchFamily="34" charset="-122"/>
@@ -11029,7 +10187,7 @@
             <a:r>
               <a:rPr lang="en-US" sz="1050" b="1" dirty="0">
                 <a:solidFill>
-                  <a:srgbClr val="1A202C"/>
+                  <a:srgbClr val="283A5E"/>
                 </a:solidFill>
                 <a:latin typeface="Calibri" pitchFamily="34" charset="0"/>
                 <a:ea typeface="Calibri" pitchFamily="34" charset="-122"/>
@@ -11074,18 +10232,7 @@
                 <a:ea typeface="Calibri" pitchFamily="34" charset="-122"/>
                 <a:cs typeface="Calibri" pitchFamily="34" charset="-120"/>
               </a:rPr>
-              <a:t>Objet : </a:t>
-            </a:r>
-            <a:r>
-              <a:rPr lang="en-US" sz="850" dirty="0">
-                <a:solidFill>
-                  <a:srgbClr val="4A5568"/>
-                </a:solidFill>
-                <a:latin typeface="Calibri" pitchFamily="34" charset="0"/>
-                <a:ea typeface="Calibri" pitchFamily="34" charset="-122"/>
-                <a:cs typeface="Calibri" pitchFamily="34" charset="-120"/>
-              </a:rPr>
-              <a:t>traiter de l'ensemble des questions relatives à l'organisation, au fonctionnement et à la réglementation de la profession taxi sur le territoire de la Métropole de Lyon.
+              <a:t>Objet : organisation, fonctionnement, réglementation de la profession taxi — Métropole de Lyon.
 </a:t>
             </a:r>
             <a:endParaRPr lang="en-US" sz="900" dirty="0"/>
@@ -11155,13 +10302,13 @@
             <a:r>
               <a:rPr lang="en-US" sz="850" b="1" dirty="0">
                 <a:solidFill>
-                  <a:srgbClr val="1A202C"/>
-                </a:solidFill>
-                <a:latin typeface="Calibri" pitchFamily="34" charset="0"/>
-                <a:ea typeface="Calibri" pitchFamily="34" charset="-122"/>
-                <a:cs typeface="Calibri" pitchFamily="34" charset="-120"/>
-              </a:rPr>
-              <a:t>L'IMC émet un avis simple et consultatif sur la délivrance de nouvelles ADS et les retraits d'ADS. Elle est informée des transactions et transferts d'ADS.</a:t>
+                  <a:srgbClr val="283A5E"/>
+                </a:solidFill>
+                <a:latin typeface="Calibri" pitchFamily="34" charset="0"/>
+                <a:ea typeface="Calibri" pitchFamily="34" charset="-122"/>
+                <a:cs typeface="Calibri" pitchFamily="34" charset="-120"/>
+              </a:rPr>
+              <a:t>Attributions de nouvelles ADS et conditions techniques : présentées en IMC.</a:t>
             </a:r>
             <a:endParaRPr lang="en-US" sz="900" dirty="0"/>
           </a:p>
@@ -11182,7 +10329,7 @@
             <a:avLst/>
           </a:prstGeom>
           <a:solidFill>
-            <a:srgbClr val="F2F2F2"/>
+            <a:srgbClr val="1E2A3A"/>
           </a:solidFill>
           <a:ln/>
         </p:spPr>
@@ -11260,7 +10407,7 @@
             <a:r>
               <a:rPr lang="en-US" sz="800" b="1" dirty="0">
                 <a:solidFill>
-                  <a:srgbClr val="1A202C"/>
+                  <a:srgbClr val="FFFFFF"/>
                 </a:solidFill>
                 <a:latin typeface="Calibri" pitchFamily="34" charset="0"/>
                 <a:ea typeface="Calibri" pitchFamily="34" charset="-122"/>
@@ -11269,57 +10416,6 @@
               <a:t>5</a:t>
             </a:r>
             <a:endParaRPr lang="en-US" sz="800" dirty="0"/>
-          </a:p>
-        </p:txBody>
-      </p:sp>
-      <p:sp>
-        <p:nvSpPr>
-          <p:cNvPr id="16" name="Rectangle 15"/>
-          <p:cNvSpPr/>
-          <p:nvPr/>
-        </p:nvSpPr>
-        <p:spPr>
-          <a:xfrm>
-            <a:off x="0" y="0"/>
-            <a:ext cx="9144000" cy="251999"/>
-          </a:xfrm>
-          <a:prstGeom prst="rect">
-            <a:avLst/>
-          </a:prstGeom>
-          <a:solidFill>
-            <a:srgbClr val="F2F2F2"/>
-          </a:solidFill>
-          <a:ln>
-            <a:noFill/>
-          </a:ln>
-        </p:spPr>
-        <p:style>
-          <a:lnRef idx="1">
-            <a:schemeClr val="accent1"/>
-          </a:lnRef>
-          <a:fillRef idx="3">
-            <a:schemeClr val="accent1"/>
-          </a:fillRef>
-          <a:effectRef idx="2">
-            <a:schemeClr val="accent1"/>
-          </a:effectRef>
-          <a:fontRef idx="minor">
-            <a:schemeClr val="lt1"/>
-          </a:fontRef>
-        </p:style>
-        <p:txBody>
-          <a:bodyPr wrap="square" rtlCol="0" anchor="ctr"/>
-          <a:lstStyle/>
-          <a:p>
-            <a:pPr algn="ctr"/>
-            <a:r>
-              <a:rPr sz="1000" b="1">
-                <a:solidFill>
-                  <a:srgbClr val="1A202C"/>
-                </a:solidFill>
-              </a:rPr>
-              <a:t>ÉPREUVE RÉGLEMENTATION LOCALE — Partie 2 sur 3</a:t>
-            </a:r>
           </a:p>
         </p:txBody>
       </p:sp>
@@ -11337,7 +10433,7 @@
     <p:bg>
       <p:bgPr>
         <a:solidFill>
-          <a:srgbClr val="F2F2F2"/>
+          <a:srgbClr val="F7F8FA"/>
         </a:solidFill>
         <a:effectLst/>
       </p:bgPr>
@@ -11371,7 +10467,7 @@
             <a:avLst/>
           </a:prstGeom>
           <a:solidFill>
-            <a:srgbClr val="F2F2F2"/>
+            <a:srgbClr val="283A5E"/>
           </a:solidFill>
           <a:ln/>
         </p:spPr>
@@ -11410,7 +10506,7 @@
             <a:r>
               <a:rPr lang="en-US" sz="900" b="1" kern="0" spc="200" dirty="0">
                 <a:solidFill>
-                  <a:srgbClr val="1A202C"/>
+                  <a:srgbClr val="D4A843"/>
                 </a:solidFill>
                 <a:latin typeface="Calibri" pitchFamily="34" charset="0"/>
                 <a:ea typeface="Calibri" pitchFamily="34" charset="-122"/>
@@ -11510,7 +10606,7 @@
             <a:avLst/>
           </a:prstGeom>
           <a:solidFill>
-            <a:srgbClr val="F2F2F2"/>
+            <a:srgbClr val="283A5E"/>
           </a:solidFill>
           <a:ln/>
         </p:spPr>
@@ -11573,7 +10669,7 @@
             <a:r>
               <a:rPr lang="en-US" sz="1200" b="1" dirty="0">
                 <a:solidFill>
-                  <a:srgbClr val="1A202C"/>
+                  <a:srgbClr val="283A5E"/>
                 </a:solidFill>
                 <a:latin typeface="Calibri" pitchFamily="34" charset="0"/>
                 <a:ea typeface="Calibri" pitchFamily="34" charset="-122"/>
@@ -11618,7 +10714,7 @@
                 <a:ea typeface="Calibri" pitchFamily="34" charset="-122"/>
                 <a:cs typeface="Calibri" pitchFamily="34" charset="-120"/>
               </a:rPr>
-              <a:t>Seul habilité sur les communes de la Métropole à gérer, attribuer, suspendre ou retirer les ADS. Les nouvelles ADS peuvent être assujetties à des caractéristiques particulières (taille, couleur, équipements PMR, motorisation…), présentées en IMC et précisées dans l'arrêté d'attribution.</a:t>
+              <a:t>Seule autorité habilitée (Métropole) : gestion, attribution, suspension, retrait des ADS. Nouvelles ADS : caractéristiques possibles (taille, couleur, PMR, motorisation), présentées en IMC, précisées dans l'arrêté d'attribution.</a:t>
             </a:r>
             <a:endParaRPr lang="en-US" sz="900" dirty="0"/>
           </a:p>
@@ -11673,7 +10769,7 @@
             <a:avLst/>
           </a:prstGeom>
           <a:solidFill>
-            <a:srgbClr val="EEEEEE"/>
+            <a:srgbClr val="C53030"/>
           </a:solidFill>
           <a:ln/>
         </p:spPr>
@@ -11781,7 +10877,7 @@
                 <a:ea typeface="Calibri" pitchFamily="34" charset="-122"/>
                 <a:cs typeface="Calibri" pitchFamily="34" charset="-120"/>
               </a:rPr>
-              <a:t>ADS exploitées de manière effective et continue. Non-exploitation &gt; 12 mois = retrait définitif. Le Permis de Circuler fait foi.</a:t>
+              <a:t>ADS exploitées de manière effective et continue. Non-exploitation &gt; 12 mois = retrait définitif. Justifiée par déclarations de revenus ou avis d'imposition.</a:t>
             </a:r>
             <a:endParaRPr lang="en-US" sz="800" dirty="0"/>
           </a:p>
@@ -11836,7 +10932,7 @@
             <a:avLst/>
           </a:prstGeom>
           <a:solidFill>
-            <a:srgbClr val="EEEEEE"/>
+            <a:srgbClr val="C05621"/>
           </a:solidFill>
           <a:ln/>
         </p:spPr>
@@ -11944,7 +11040,7 @@
                 <a:ea typeface="Calibri" pitchFamily="34" charset="-122"/>
                 <a:cs typeface="Calibri" pitchFamily="34" charset="-120"/>
               </a:rPr>
-              <a:t>Les ADS délivrées après le 1er octobre 2014 sont individuelles, nominatives, incessibles, valables pour un seul véhicule. Le titulaire en est le conducteur exclusif (Art. 4-2 — Arrêté du 27/11/2024).</a:t>
+              <a:t>ADS attribuées avant le 1er octobre 2014 : un seul contrat de location-gérance à un seul locataire-gérant. Pas de bissage (2 entreprises sur une même licence).</a:t>
             </a:r>
             <a:endParaRPr lang="en-US" sz="800" dirty="0"/>
           </a:p>
@@ -11999,7 +11095,7 @@
             <a:avLst/>
           </a:prstGeom>
           <a:solidFill>
-            <a:srgbClr val="EEEEEE"/>
+            <a:srgbClr val="276749"/>
           </a:solidFill>
           <a:ln/>
         </p:spPr>
@@ -12107,7 +11203,7 @@
                 <a:ea typeface="Calibri" pitchFamily="34" charset="-122"/>
                 <a:cs typeface="Calibri" pitchFamily="34" charset="-120"/>
               </a:rPr>
-              <a:t>Société/titulaire peut faire exploiter ses ADS par n'importe quel salarié ayant carte pro et conditions réglementaires. Le salarié doit fournir son contrat de travail lors de tout contrôle.</a:t>
+              <a:t>Exploitation ADS par salarié : carte pro + conditions réglementaires requises. Contrat de travail à fournir lors de tout contrôle.</a:t>
             </a:r>
             <a:endParaRPr lang="en-US" sz="800" dirty="0"/>
           </a:p>
@@ -12128,7 +11224,7 @@
             <a:avLst/>
           </a:prstGeom>
           <a:solidFill>
-            <a:srgbClr val="F2F2F2"/>
+            <a:srgbClr val="1E2A3A"/>
           </a:solidFill>
           <a:ln/>
         </p:spPr>
@@ -12206,7 +11302,7 @@
             <a:r>
               <a:rPr lang="en-US" sz="800" b="1" dirty="0">
                 <a:solidFill>
-                  <a:srgbClr val="1A202C"/>
+                  <a:srgbClr val="FFFFFF"/>
                 </a:solidFill>
                 <a:latin typeface="Calibri" pitchFamily="34" charset="0"/>
                 <a:ea typeface="Calibri" pitchFamily="34" charset="-122"/>
@@ -12215,57 +11311,6 @@
               <a:t>6</a:t>
             </a:r>
             <a:endParaRPr lang="en-US" sz="800" dirty="0"/>
-          </a:p>
-        </p:txBody>
-      </p:sp>
-      <p:sp>
-        <p:nvSpPr>
-          <p:cNvPr id="28" name="Rectangle 27"/>
-          <p:cNvSpPr/>
-          <p:nvPr/>
-        </p:nvSpPr>
-        <p:spPr>
-          <a:xfrm>
-            <a:off x="0" y="0"/>
-            <a:ext cx="9144000" cy="251999"/>
-          </a:xfrm>
-          <a:prstGeom prst="rect">
-            <a:avLst/>
-          </a:prstGeom>
-          <a:solidFill>
-            <a:srgbClr val="F2F2F2"/>
-          </a:solidFill>
-          <a:ln>
-            <a:noFill/>
-          </a:ln>
-        </p:spPr>
-        <p:style>
-          <a:lnRef idx="1">
-            <a:schemeClr val="accent1"/>
-          </a:lnRef>
-          <a:fillRef idx="3">
-            <a:schemeClr val="accent1"/>
-          </a:fillRef>
-          <a:effectRef idx="2">
-            <a:schemeClr val="accent1"/>
-          </a:effectRef>
-          <a:fontRef idx="minor">
-            <a:schemeClr val="lt1"/>
-          </a:fontRef>
-        </p:style>
-        <p:txBody>
-          <a:bodyPr wrap="square" rtlCol="0" anchor="ctr"/>
-          <a:lstStyle/>
-          <a:p>
-            <a:pPr algn="ctr"/>
-            <a:r>
-              <a:rPr sz="1000" b="1">
-                <a:solidFill>
-                  <a:srgbClr val="1A202C"/>
-                </a:solidFill>
-              </a:rPr>
-              <a:t>ÉPREUVE RÉGLEMENTATION LOCALE — Partie 2 sur 3</a:t>
-            </a:r>
           </a:p>
         </p:txBody>
       </p:sp>
@@ -12283,7 +11328,7 @@
     <p:bg>
       <p:bgPr>
         <a:solidFill>
-          <a:srgbClr val="F2F2F2"/>
+          <a:srgbClr val="F7F8FA"/>
         </a:solidFill>
         <a:effectLst/>
       </p:bgPr>
@@ -12317,7 +11362,7 @@
             <a:avLst/>
           </a:prstGeom>
           <a:solidFill>
-            <a:srgbClr val="F2F2F2"/>
+            <a:srgbClr val="283A5E"/>
           </a:solidFill>
           <a:ln/>
         </p:spPr>
@@ -12356,7 +11401,7 @@
             <a:r>
               <a:rPr lang="en-US" sz="900" b="1" kern="0" spc="200" dirty="0">
                 <a:solidFill>
-                  <a:srgbClr val="1A202C"/>
+                  <a:srgbClr val="D4A843"/>
                 </a:solidFill>
                 <a:latin typeface="Calibri" pitchFamily="34" charset="0"/>
                 <a:ea typeface="Calibri" pitchFamily="34" charset="-122"/>
@@ -12401,7 +11446,7 @@
                 <a:ea typeface="Georgia" pitchFamily="34" charset="-122"/>
                 <a:cs typeface="Georgia" pitchFamily="34" charset="-120"/>
               </a:rPr>
-              <a:t>Attestation de conformité — Obligations &amp; validité</a:t>
+              <a:t>Justificatif d'exploitation — ADS &amp; cas de l'aéroport</a:t>
             </a:r>
             <a:endParaRPr lang="en-US" sz="1800" dirty="0"/>
           </a:p>
@@ -12456,7 +11501,7 @@
             <a:avLst/>
           </a:prstGeom>
           <a:solidFill>
-            <a:srgbClr val="EEEEEE"/>
+            <a:srgbClr val="2B6CB0"/>
           </a:solidFill>
           <a:ln/>
         </p:spPr>
@@ -12525,7 +11570,7 @@
                 <a:ea typeface="Calibri" pitchFamily="34" charset="-122"/>
                 <a:cs typeface="Calibri" pitchFamily="34" charset="-120"/>
               </a:rPr>
-              <a:t>Établi par la Métropole</a:t>
+              <a:t>Pas de pièce unique imposée</a:t>
             </a:r>
             <a:endParaRPr lang="en-US" sz="1100" dirty="0"/>
           </a:p>
@@ -12564,7 +11609,7 @@
                 <a:ea typeface="Calibri" pitchFamily="34" charset="-122"/>
                 <a:cs typeface="Calibri" pitchFamily="34" charset="-120"/>
               </a:rPr>
-              <a:t>L'attestation de conformité est délivrée par le guichet de l'unité taxis de la Métropole. Elle est valable 1 an ou jusqu'au changement de situation du conducteur ou du véhicule.</a:t>
+              <a:t>Le « permis de circuler » créé par arrêté métropolitain a été annulé par la CAA de Lyon (19/01/2024) : la Métropole ne peut imposer une pièce unique obligatoire.</a:t>
             </a:r>
             <a:endParaRPr lang="en-US" sz="850" dirty="0"/>
           </a:p>
@@ -12619,7 +11664,7 @@
             <a:avLst/>
           </a:prstGeom>
           <a:solidFill>
-            <a:srgbClr val="EEEEEE"/>
+            <a:srgbClr val="276749"/>
           </a:solidFill>
           <a:ln/>
         </p:spPr>
@@ -12688,7 +11733,7 @@
                 <a:ea typeface="Calibri" pitchFamily="34" charset="-122"/>
                 <a:cs typeface="Calibri" pitchFamily="34" charset="-120"/>
               </a:rPr>
-              <a:t>Pièce principale</a:t>
+              <a:t>Moyens de preuve admis</a:t>
             </a:r>
             <a:endParaRPr lang="en-US" sz="1100" dirty="0"/>
           </a:p>
@@ -12727,7 +11772,7 @@
                 <a:ea typeface="Calibri" pitchFamily="34" charset="-122"/>
                 <a:cs typeface="Calibri" pitchFamily="34" charset="-120"/>
               </a:rPr>
-              <a:t>Atteste l'exploitation de l'ADS et garantit le contrôle administratif du chauffeur et du véhicule. Aucun véhicule taxi n'est autorisé à circuler sans l'original.</a:t>
+              <a:t>Exploitation continue et effective justifiée par copie des déclarations de revenus ou des avis d'imposition (art. R.3121-6 code des transports) — la Métropole peut ajouter un moyen alternatif par arrêté, mais pas le rendre exclusif.</a:t>
             </a:r>
             <a:endParaRPr lang="en-US" sz="850" dirty="0"/>
           </a:p>
@@ -12782,7 +11827,7 @@
             <a:avLst/>
           </a:prstGeom>
           <a:solidFill>
-            <a:srgbClr val="EEEEEE"/>
+            <a:srgbClr val="C05621"/>
           </a:solidFill>
           <a:ln/>
         </p:spPr>
@@ -12851,7 +11896,7 @@
                 <a:ea typeface="Calibri" pitchFamily="34" charset="-122"/>
                 <a:cs typeface="Calibri" pitchFamily="34" charset="-120"/>
               </a:rPr>
-              <a:t>Validité : 1 an</a:t>
+              <a:t>Exception : aéroport St Exupéry</a:t>
             </a:r>
             <a:endParaRPr lang="en-US" sz="1100" dirty="0"/>
           </a:p>
@@ -12890,7 +11935,7 @@
                 <a:ea typeface="Calibri" pitchFamily="34" charset="-122"/>
                 <a:cs typeface="Calibri" pitchFamily="34" charset="-120"/>
               </a:rPr>
-              <a:t>Valable 1 an à compter de sa date de délivrance (hors modification d'un élément lié au contrat ou au véhicule). Tout dépassement = incident d'exploitation.</a:t>
+              <a:t>Pour les ADS de l'aéroport Lyon-Saint Exupéry uniquement, un permis de circuler distinct reste exigé, délivré par la Préfecture (démarche annuelle en ligne).</a:t>
             </a:r>
             <a:endParaRPr lang="en-US" sz="850" dirty="0"/>
           </a:p>
@@ -12945,7 +11990,7 @@
             <a:avLst/>
           </a:prstGeom>
           <a:solidFill>
-            <a:srgbClr val="EEEEEE"/>
+            <a:srgbClr val="C53030"/>
           </a:solidFill>
           <a:ln/>
         </p:spPr>
@@ -13014,7 +12059,7 @@
                 <a:ea typeface="Calibri" pitchFamily="34" charset="-122"/>
                 <a:cs typeface="Calibri" pitchFamily="34" charset="-120"/>
               </a:rPr>
-              <a:t>Contrôle annuel obligatoire</a:t>
+              <a:t>Contrôle partagé</a:t>
             </a:r>
             <a:endParaRPr lang="en-US" sz="1100" dirty="0"/>
           </a:p>
@@ -13053,7 +12098,7 @@
                 <a:ea typeface="Calibri" pitchFamily="34" charset="-122"/>
                 <a:cs typeface="Calibri" pitchFamily="34" charset="-120"/>
               </a:rPr>
-              <a:t>Une fois par an, le conducteur se présente au guichet de l'unité taxis avec les documents relatifs au conducteur et au véhicule pour renouveler l'attestation de conformité (Art. 8 de l'arrêté métropolitain du 27/11/2024).</a:t>
+              <a:t>Le respect de la réglementation par les conducteurs de taxi reste contrôlé conjointement par le Président de la Métropole et le Préfet.</a:t>
             </a:r>
             <a:endParaRPr lang="en-US" sz="850" dirty="0"/>
           </a:p>
@@ -13074,7 +12119,7 @@
             <a:avLst/>
           </a:prstGeom>
           <a:solidFill>
-            <a:srgbClr val="F2F2F2"/>
+            <a:srgbClr val="1E2A3A"/>
           </a:solidFill>
           <a:ln/>
         </p:spPr>
@@ -13152,7 +12197,7 @@
             <a:r>
               <a:rPr lang="en-US" sz="800" b="1" dirty="0">
                 <a:solidFill>
-                  <a:srgbClr val="1A202C"/>
+                  <a:srgbClr val="FFFFFF"/>
                 </a:solidFill>
                 <a:latin typeface="Calibri" pitchFamily="34" charset="0"/>
                 <a:ea typeface="Calibri" pitchFamily="34" charset="-122"/>
@@ -13161,57 +12206,6 @@
               <a:t>7</a:t>
             </a:r>
             <a:endParaRPr lang="en-US" sz="800" dirty="0"/>
-          </a:p>
-        </p:txBody>
-      </p:sp>
-      <p:sp>
-        <p:nvSpPr>
-          <p:cNvPr id="28" name="Rectangle 27"/>
-          <p:cNvSpPr/>
-          <p:nvPr/>
-        </p:nvSpPr>
-        <p:spPr>
-          <a:xfrm>
-            <a:off x="0" y="0"/>
-            <a:ext cx="9144000" cy="251999"/>
-          </a:xfrm>
-          <a:prstGeom prst="rect">
-            <a:avLst/>
-          </a:prstGeom>
-          <a:solidFill>
-            <a:srgbClr val="F2F2F2"/>
-          </a:solidFill>
-          <a:ln>
-            <a:noFill/>
-          </a:ln>
-        </p:spPr>
-        <p:style>
-          <a:lnRef idx="1">
-            <a:schemeClr val="accent1"/>
-          </a:lnRef>
-          <a:fillRef idx="3">
-            <a:schemeClr val="accent1"/>
-          </a:fillRef>
-          <a:effectRef idx="2">
-            <a:schemeClr val="accent1"/>
-          </a:effectRef>
-          <a:fontRef idx="minor">
-            <a:schemeClr val="lt1"/>
-          </a:fontRef>
-        </p:style>
-        <p:txBody>
-          <a:bodyPr wrap="square" rtlCol="0" anchor="ctr"/>
-          <a:lstStyle/>
-          <a:p>
-            <a:pPr algn="ctr"/>
-            <a:r>
-              <a:rPr sz="1000" b="1">
-                <a:solidFill>
-                  <a:srgbClr val="1A202C"/>
-                </a:solidFill>
-              </a:rPr>
-              <a:t>ÉPREUVE RÉGLEMENTATION LOCALE — Partie 2 sur 3</a:t>
-            </a:r>
           </a:p>
         </p:txBody>
       </p:sp>
@@ -13229,7 +12223,7 @@
     <p:bg>
       <p:bgPr>
         <a:solidFill>
-          <a:srgbClr val="F2F2F2"/>
+          <a:srgbClr val="F7F8FA"/>
         </a:solidFill>
         <a:effectLst/>
       </p:bgPr>
@@ -13263,7 +12257,7 @@
             <a:avLst/>
           </a:prstGeom>
           <a:solidFill>
-            <a:srgbClr val="F2F2F2"/>
+            <a:srgbClr val="283A5E"/>
           </a:solidFill>
           <a:ln/>
         </p:spPr>
@@ -13302,7 +12296,7 @@
             <a:r>
               <a:rPr lang="en-US" sz="900" b="1" kern="0" spc="200" dirty="0">
                 <a:solidFill>
-                  <a:srgbClr val="1A202C"/>
+                  <a:srgbClr val="D4A843"/>
                 </a:solidFill>
                 <a:latin typeface="Calibri" pitchFamily="34" charset="0"/>
                 <a:ea typeface="Calibri" pitchFamily="34" charset="-122"/>
@@ -13438,7 +12432,7 @@
             <a:r>
               <a:rPr lang="en-US" sz="1200" b="1" dirty="0">
                 <a:solidFill>
-                  <a:srgbClr val="1A202C"/>
+                  <a:srgbClr val="C53030"/>
                 </a:solidFill>
                 <a:latin typeface="Calibri" pitchFamily="34" charset="0"/>
                 <a:ea typeface="Calibri" pitchFamily="34" charset="-122"/>
@@ -13513,7 +12507,7 @@
             <a:r>
               <a:rPr lang="en-US" sz="900" b="1" dirty="0">
                 <a:solidFill>
-                  <a:srgbClr val="1A202C"/>
+                  <a:srgbClr val="C53030"/>
                 </a:solidFill>
                 <a:latin typeface="Calibri" pitchFamily="34" charset="0"/>
                 <a:ea typeface="Calibri" pitchFamily="34" charset="-122"/>
@@ -13585,7 +12579,7 @@
             <a:r>
               <a:rPr lang="en-US" sz="800" b="1" dirty="0">
                 <a:solidFill>
-                  <a:srgbClr val="1A202C"/>
+                  <a:srgbClr val="283A5E"/>
                 </a:solidFill>
                 <a:latin typeface="Calibri" pitchFamily="34" charset="0"/>
                 <a:ea typeface="Calibri" pitchFamily="34" charset="-122"/>
@@ -13682,7 +12676,7 @@
             <a:r>
               <a:rPr lang="en-US" sz="1200" b="1" dirty="0">
                 <a:solidFill>
-                  <a:srgbClr val="1A202C"/>
+                  <a:srgbClr val="2B6CB0"/>
                 </a:solidFill>
                 <a:latin typeface="Calibri" pitchFamily="34" charset="0"/>
                 <a:ea typeface="Calibri" pitchFamily="34" charset="-122"/>
@@ -13727,7 +12721,7 @@
                 <a:ea typeface="Calibri" pitchFamily="34" charset="-122"/>
                 <a:cs typeface="Calibri" pitchFamily="34" charset="-120"/>
               </a:rPr>
-              <a:t>Le conducteur doit admettre les personnes handicapées pouvant monter/descendre avec l'aide du conducteur (sans portage). Fauteuil roulant pliable sans équipements médicaux complémentaires. Tout manquement → convocation en conseil de discipline préfectorale.</a:t>
+              <a:t>Admission obligatoire : personnes handicapées (montée/descente avec aide, sans portage), fauteuil pliable sans équipement médical. Manquement → conseil de discipline préfectorale.</a:t>
             </a:r>
             <a:endParaRPr lang="en-US" sz="850" dirty="0"/>
           </a:p>
@@ -13742,7 +12736,7 @@
         <p:spPr>
           <a:xfrm>
             <a:off x="4663440" y="2834640"/>
-            <a:ext cx="4023360" cy="1851660"/>
+            <a:ext cx="4023360" cy="1554480"/>
           </a:xfrm>
           <a:prstGeom prst="rect">
             <a:avLst/>
@@ -13818,7 +12812,7 @@
             <a:r>
               <a:rPr lang="en-US" sz="1200" b="1" dirty="0">
                 <a:solidFill>
-                  <a:srgbClr val="1A202C"/>
+                  <a:srgbClr val="276749"/>
                 </a:solidFill>
                 <a:latin typeface="Calibri" pitchFamily="34" charset="0"/>
                 <a:ea typeface="Calibri" pitchFamily="34" charset="-122"/>
@@ -13950,7 +12944,7 @@
             <a:r>
               <a:rPr lang="en-US" sz="850" b="1" dirty="0">
                 <a:solidFill>
-                  <a:srgbClr val="1A202C"/>
+                  <a:srgbClr val="283A5E"/>
                 </a:solidFill>
                 <a:latin typeface="Calibri" pitchFamily="34" charset="0"/>
                 <a:ea typeface="Calibri" pitchFamily="34" charset="-122"/>
@@ -13977,7 +12971,7 @@
             <a:avLst/>
           </a:prstGeom>
           <a:solidFill>
-            <a:srgbClr val="F2F2F2"/>
+            <a:srgbClr val="1E2A3A"/>
           </a:solidFill>
           <a:ln/>
         </p:spPr>
@@ -14055,7 +13049,7 @@
             <a:r>
               <a:rPr lang="en-US" sz="800" b="1" dirty="0">
                 <a:solidFill>
-                  <a:srgbClr val="1A202C"/>
+                  <a:srgbClr val="FFFFFF"/>
                 </a:solidFill>
                 <a:latin typeface="Calibri" pitchFamily="34" charset="0"/>
                 <a:ea typeface="Calibri" pitchFamily="34" charset="-122"/>
@@ -14064,57 +13058,6 @@
               <a:t>8</a:t>
             </a:r>
             <a:endParaRPr lang="en-US" sz="800" dirty="0"/>
-          </a:p>
-        </p:txBody>
-      </p:sp>
-      <p:sp>
-        <p:nvSpPr>
-          <p:cNvPr id="20" name="Rectangle 19"/>
-          <p:cNvSpPr/>
-          <p:nvPr/>
-        </p:nvSpPr>
-        <p:spPr>
-          <a:xfrm>
-            <a:off x="0" y="0"/>
-            <a:ext cx="9144000" cy="251999"/>
-          </a:xfrm>
-          <a:prstGeom prst="rect">
-            <a:avLst/>
-          </a:prstGeom>
-          <a:solidFill>
-            <a:srgbClr val="F2F2F2"/>
-          </a:solidFill>
-          <a:ln>
-            <a:noFill/>
-          </a:ln>
-        </p:spPr>
-        <p:style>
-          <a:lnRef idx="1">
-            <a:schemeClr val="accent1"/>
-          </a:lnRef>
-          <a:fillRef idx="3">
-            <a:schemeClr val="accent1"/>
-          </a:fillRef>
-          <a:effectRef idx="2">
-            <a:schemeClr val="accent1"/>
-          </a:effectRef>
-          <a:fontRef idx="minor">
-            <a:schemeClr val="lt1"/>
-          </a:fontRef>
-        </p:style>
-        <p:txBody>
-          <a:bodyPr wrap="square" rtlCol="0" anchor="ctr"/>
-          <a:lstStyle/>
-          <a:p>
-            <a:pPr algn="ctr"/>
-            <a:r>
-              <a:rPr sz="1000" b="1">
-                <a:solidFill>
-                  <a:srgbClr val="1A202C"/>
-                </a:solidFill>
-              </a:rPr>
-              <a:t>ÉPREUVE RÉGLEMENTATION LOCALE — Partie 2 sur 3</a:t>
-            </a:r>
           </a:p>
         </p:txBody>
       </p:sp>
@@ -14132,7 +13075,7 @@
     <p:bg>
       <p:bgPr>
         <a:solidFill>
-          <a:srgbClr val="F2F2F2"/>
+          <a:srgbClr val="F7F8FA"/>
         </a:solidFill>
         <a:effectLst/>
       </p:bgPr>
@@ -14166,7 +13109,7 @@
             <a:avLst/>
           </a:prstGeom>
           <a:solidFill>
-            <a:srgbClr val="F2F2F2"/>
+            <a:srgbClr val="283A5E"/>
           </a:solidFill>
           <a:ln/>
         </p:spPr>
@@ -14205,7 +13148,7 @@
             <a:r>
               <a:rPr lang="en-US" sz="900" b="1" kern="0" spc="200" dirty="0">
                 <a:solidFill>
-                  <a:srgbClr val="1A202C"/>
+                  <a:srgbClr val="D4A843"/>
                 </a:solidFill>
                 <a:latin typeface="Calibri" pitchFamily="34" charset="0"/>
                 <a:ea typeface="Calibri" pitchFamily="34" charset="-122"/>
@@ -14264,7 +13207,7 @@
         </p:nvSpPr>
         <p:spPr>
           <a:xfrm>
-            <a:off x="367145" y="1184148"/>
+            <a:off x="457200" y="1188720"/>
             <a:ext cx="3931920" cy="3200400"/>
           </a:xfrm>
           <a:prstGeom prst="rect">
@@ -14341,13 +13284,13 @@
             <a:r>
               <a:rPr lang="en-US" sz="1050" b="1" dirty="0">
                 <a:solidFill>
-                  <a:srgbClr val="1A202C"/>
-                </a:solidFill>
-                <a:latin typeface="Calibri" pitchFamily="34" charset="0"/>
-                <a:ea typeface="Calibri" pitchFamily="34" charset="-122"/>
-                <a:cs typeface="Calibri" pitchFamily="34" charset="-120"/>
-              </a:rPr>
-              <a:t>Caractéristiques obligatoires (arrêté du 27/11/2024)</a:t>
+                  <a:srgbClr val="2B6CB0"/>
+                </a:solidFill>
+                <a:latin typeface="Calibri" pitchFamily="34" charset="0"/>
+                <a:ea typeface="Calibri" pitchFamily="34" charset="-122"/>
+                <a:cs typeface="Calibri" pitchFamily="34" charset="-120"/>
+              </a:rPr>
+              <a:t>Caractéristiques obligatoires (depuis janv. 2020)</a:t>
             </a:r>
             <a:endParaRPr lang="en-US" sz="1050" dirty="0"/>
           </a:p>
@@ -14355,118 +13298,13 @@
       </p:sp>
       <p:sp>
         <p:nvSpPr>
-          <p:cNvPr id="8" name="Shape 5"/>
+          <p:cNvPr id="11" name="Shape 8"/>
           <p:cNvSpPr/>
           <p:nvPr/>
         </p:nvSpPr>
         <p:spPr>
           <a:xfrm>
             <a:off x="640080" y="1737360"/>
-            <a:ext cx="3566160" cy="502920"/>
-          </a:xfrm>
-          <a:prstGeom prst="rect">
-            <a:avLst/>
-          </a:prstGeom>
-          <a:solidFill>
-            <a:srgbClr val="F8F8F8"/>
-          </a:solidFill>
-          <a:ln/>
-        </p:spPr>
-        <p:txBody>
-          <a:bodyPr/>
-          <a:lstStyle/>
-          <a:p>
-            <a:endParaRPr lang="fr-FR"/>
-          </a:p>
-        </p:txBody>
-      </p:sp>
-      <p:sp>
-        <p:nvSpPr>
-          <p:cNvPr id="9" name="Text 6"/>
-          <p:cNvSpPr/>
-          <p:nvPr/>
-        </p:nvSpPr>
-        <p:spPr>
-          <a:xfrm>
-            <a:off x="731520" y="1783080"/>
-            <a:ext cx="1097280" cy="182880"/>
-          </a:xfrm>
-          <a:prstGeom prst="rect">
-            <a:avLst/>
-          </a:prstGeom>
-          <a:noFill/>
-          <a:ln/>
-        </p:spPr>
-        <p:txBody>
-          <a:bodyPr wrap="square" lIns="0" tIns="0" rIns="0" bIns="0" rtlCol="0" anchor="ctr"/>
-          <a:lstStyle/>
-          <a:p>
-            <a:pPr marL="0" indent="0">
-              <a:buNone/>
-            </a:pPr>
-            <a:r>
-              <a:rPr lang="en-US" sz="900" b="1" dirty="0">
-                <a:solidFill>
-                  <a:srgbClr val="1A202C"/>
-                </a:solidFill>
-                <a:latin typeface="Calibri" pitchFamily="34" charset="0"/>
-                <a:ea typeface="Calibri" pitchFamily="34" charset="-122"/>
-                <a:cs typeface="Calibri" pitchFamily="34" charset="-120"/>
-              </a:rPr>
-              <a:t>Couleur</a:t>
-            </a:r>
-            <a:endParaRPr lang="en-US" sz="900" dirty="0"/>
-          </a:p>
-        </p:txBody>
-      </p:sp>
-      <p:sp>
-        <p:nvSpPr>
-          <p:cNvPr id="10" name="Text 7"/>
-          <p:cNvSpPr/>
-          <p:nvPr/>
-        </p:nvSpPr>
-        <p:spPr>
-          <a:xfrm>
-            <a:off x="731520" y="1993392"/>
-            <a:ext cx="3383280" cy="182880"/>
-          </a:xfrm>
-          <a:prstGeom prst="rect">
-            <a:avLst/>
-          </a:prstGeom>
-          <a:noFill/>
-          <a:ln/>
-        </p:spPr>
-        <p:txBody>
-          <a:bodyPr wrap="square" lIns="0" tIns="0" rIns="0" bIns="0" rtlCol="0" anchor="ctr"/>
-          <a:lstStyle/>
-          <a:p>
-            <a:pPr marL="0" indent="0">
-              <a:buNone/>
-            </a:pPr>
-            <a:r>
-              <a:rPr lang="en-US" sz="850" dirty="0">
-                <a:solidFill>
-                  <a:srgbClr val="4A5568"/>
-                </a:solidFill>
-                <a:latin typeface="Calibri" pitchFamily="34" charset="0"/>
-                <a:ea typeface="Calibri" pitchFamily="34" charset="-122"/>
-                <a:cs typeface="Calibri" pitchFamily="34" charset="-120"/>
-              </a:rPr>
-              <a:t>Non réglementée dans l'arrêté du 27/11/2024</a:t>
-            </a:r>
-            <a:endParaRPr lang="en-US" sz="850" dirty="0"/>
-          </a:p>
-        </p:txBody>
-      </p:sp>
-      <p:sp>
-        <p:nvSpPr>
-          <p:cNvPr id="11" name="Shape 8"/>
-          <p:cNvSpPr/>
-          <p:nvPr/>
-        </p:nvSpPr>
-        <p:spPr>
-          <a:xfrm>
-            <a:off x="640080" y="2331720"/>
             <a:ext cx="3566160" cy="502920"/>
           </a:xfrm>
           <a:prstGeom prst="rect">
@@ -14493,6 +13331,111 @@
         </p:nvSpPr>
         <p:spPr>
           <a:xfrm>
+            <a:off x="731520" y="1783080"/>
+            <a:ext cx="1097280" cy="182880"/>
+          </a:xfrm>
+          <a:prstGeom prst="rect">
+            <a:avLst/>
+          </a:prstGeom>
+          <a:noFill/>
+          <a:ln/>
+        </p:spPr>
+        <p:txBody>
+          <a:bodyPr wrap="square" lIns="0" tIns="0" rIns="0" bIns="0" rtlCol="0" anchor="ctr"/>
+          <a:lstStyle/>
+          <a:p>
+            <a:pPr marL="0" indent="0">
+              <a:buNone/>
+            </a:pPr>
+            <a:r>
+              <a:rPr lang="en-US" sz="900" b="1" dirty="0">
+                <a:solidFill>
+                  <a:srgbClr val="283A5E"/>
+                </a:solidFill>
+                <a:latin typeface="Calibri" pitchFamily="34" charset="0"/>
+                <a:ea typeface="Calibri" pitchFamily="34" charset="-122"/>
+                <a:cs typeface="Calibri" pitchFamily="34" charset="-120"/>
+              </a:rPr>
+              <a:t>Places</a:t>
+            </a:r>
+            <a:endParaRPr lang="en-US" sz="900" dirty="0"/>
+          </a:p>
+        </p:txBody>
+      </p:sp>
+      <p:sp>
+        <p:nvSpPr>
+          <p:cNvPr id="13" name="Text 10"/>
+          <p:cNvSpPr/>
+          <p:nvPr/>
+        </p:nvSpPr>
+        <p:spPr>
+          <a:xfrm>
+            <a:off x="731520" y="1993392"/>
+            <a:ext cx="3383280" cy="182880"/>
+          </a:xfrm>
+          <a:prstGeom prst="rect">
+            <a:avLst/>
+          </a:prstGeom>
+          <a:noFill/>
+          <a:ln/>
+        </p:spPr>
+        <p:txBody>
+          <a:bodyPr wrap="square" lIns="0" tIns="0" rIns="0" bIns="0" rtlCol="0" anchor="ctr"/>
+          <a:lstStyle/>
+          <a:p>
+            <a:pPr marL="0" indent="0">
+              <a:buNone/>
+            </a:pPr>
+            <a:r>
+              <a:rPr lang="en-US" sz="850" dirty="0">
+                <a:solidFill>
+                  <a:srgbClr val="4A5568"/>
+                </a:solidFill>
+                <a:latin typeface="Calibri" pitchFamily="34" charset="0"/>
+                <a:ea typeface="Calibri" pitchFamily="34" charset="-122"/>
+                <a:cs typeface="Calibri" pitchFamily="34" charset="-120"/>
+              </a:rPr>
+              <a:t>8 places assises max (+ siège conducteur)</a:t>
+            </a:r>
+            <a:endParaRPr lang="en-US" sz="850" dirty="0"/>
+          </a:p>
+        </p:txBody>
+      </p:sp>
+      <p:sp>
+        <p:nvSpPr>
+          <p:cNvPr id="14" name="Shape 11"/>
+          <p:cNvSpPr/>
+          <p:nvPr/>
+        </p:nvSpPr>
+        <p:spPr>
+          <a:xfrm>
+            <a:off x="640080" y="2331720"/>
+            <a:ext cx="3566160" cy="502920"/>
+          </a:xfrm>
+          <a:prstGeom prst="rect">
+            <a:avLst/>
+          </a:prstGeom>
+          <a:solidFill>
+            <a:srgbClr val="EBF4FF"/>
+          </a:solidFill>
+          <a:ln/>
+        </p:spPr>
+        <p:txBody>
+          <a:bodyPr/>
+          <a:lstStyle/>
+          <a:p>
+            <a:endParaRPr lang="fr-FR"/>
+          </a:p>
+        </p:txBody>
+      </p:sp>
+      <p:sp>
+        <p:nvSpPr>
+          <p:cNvPr id="15" name="Text 12"/>
+          <p:cNvSpPr/>
+          <p:nvPr/>
+        </p:nvSpPr>
+        <p:spPr>
+          <a:xfrm>
             <a:off x="731520" y="2377440"/>
             <a:ext cx="1097280" cy="182880"/>
           </a:xfrm>
@@ -14512,13 +13455,13 @@
             <a:r>
               <a:rPr lang="en-US" sz="900" b="1" dirty="0">
                 <a:solidFill>
-                  <a:srgbClr val="1A202C"/>
-                </a:solidFill>
-                <a:latin typeface="Calibri" pitchFamily="34" charset="0"/>
-                <a:ea typeface="Calibri" pitchFamily="34" charset="-122"/>
-                <a:cs typeface="Calibri" pitchFamily="34" charset="-120"/>
-              </a:rPr>
-              <a:t>Places</a:t>
+                  <a:srgbClr val="283A5E"/>
+                </a:solidFill>
+                <a:latin typeface="Calibri" pitchFamily="34" charset="0"/>
+                <a:ea typeface="Calibri" pitchFamily="34" charset="-122"/>
+                <a:cs typeface="Calibri" pitchFamily="34" charset="-120"/>
+              </a:rPr>
+              <a:t>Coffre</a:t>
             </a:r>
             <a:endParaRPr lang="en-US" sz="900" dirty="0"/>
           </a:p>
@@ -14526,7 +13469,7 @@
       </p:sp>
       <p:sp>
         <p:nvSpPr>
-          <p:cNvPr id="13" name="Text 10"/>
+          <p:cNvPr id="16" name="Text 13"/>
           <p:cNvSpPr/>
           <p:nvPr/>
         </p:nvSpPr>
@@ -14557,7 +13500,7 @@
                 <a:ea typeface="Calibri" pitchFamily="34" charset="-122"/>
                 <a:cs typeface="Calibri" pitchFamily="34" charset="-120"/>
               </a:rPr>
-              <a:t>8 places assises max (+ siège conducteur)</a:t>
+              <a:t>400 litres min (thermique) / 300 litres (faibles émissions)</a:t>
             </a:r>
             <a:endParaRPr lang="en-US" sz="850" dirty="0"/>
           </a:p>
@@ -14565,7 +13508,7 @@
       </p:sp>
       <p:sp>
         <p:nvSpPr>
-          <p:cNvPr id="14" name="Shape 11"/>
+          <p:cNvPr id="17" name="Shape 14"/>
           <p:cNvSpPr/>
           <p:nvPr/>
         </p:nvSpPr>
@@ -14578,7 +13521,7 @@
             <a:avLst/>
           </a:prstGeom>
           <a:solidFill>
-            <a:srgbClr val="F8F8F8"/>
+            <a:srgbClr val="FFFFFF"/>
           </a:solidFill>
           <a:ln/>
         </p:spPr>
@@ -14592,7 +13535,7 @@
       </p:sp>
       <p:sp>
         <p:nvSpPr>
-          <p:cNvPr id="15" name="Text 12"/>
+          <p:cNvPr id="18" name="Text 15"/>
           <p:cNvSpPr/>
           <p:nvPr/>
         </p:nvSpPr>
@@ -14617,13 +13560,13 @@
             <a:r>
               <a:rPr lang="en-US" sz="900" b="1" dirty="0">
                 <a:solidFill>
-                  <a:srgbClr val="1A202C"/>
-                </a:solidFill>
-                <a:latin typeface="Calibri" pitchFamily="34" charset="0"/>
-                <a:ea typeface="Calibri" pitchFamily="34" charset="-122"/>
-                <a:cs typeface="Calibri" pitchFamily="34" charset="-120"/>
-              </a:rPr>
-              <a:t>Coffre</a:t>
+                  <a:srgbClr val="283A5E"/>
+                </a:solidFill>
+                <a:latin typeface="Calibri" pitchFamily="34" charset="0"/>
+                <a:ea typeface="Calibri" pitchFamily="34" charset="-122"/>
+                <a:cs typeface="Calibri" pitchFamily="34" charset="-120"/>
+              </a:rPr>
+              <a:t>Émissions</a:t>
             </a:r>
             <a:endParaRPr lang="en-US" sz="900" dirty="0"/>
           </a:p>
@@ -14631,7 +13574,7 @@
       </p:sp>
       <p:sp>
         <p:nvSpPr>
-          <p:cNvPr id="16" name="Text 13"/>
+          <p:cNvPr id="19" name="Text 16"/>
           <p:cNvSpPr/>
           <p:nvPr/>
         </p:nvSpPr>
@@ -14662,36 +13605,8 @@
                 <a:ea typeface="Calibri" pitchFamily="34" charset="-122"/>
                 <a:cs typeface="Calibri" pitchFamily="34" charset="-120"/>
               </a:rPr>
-              <a:t>400 litres min (thermique) / 300 litres (faibles émissions)</a:t>
-            </a:r>
-            <a:endParaRPr lang="en-US" sz="850" dirty="0"/>
-          </a:p>
-        </p:txBody>
-      </p:sp>
-      <p:sp>
-        <p:nvSpPr>
-          <p:cNvPr id="19" name="Text 16"/>
-          <p:cNvSpPr/>
-          <p:nvPr/>
-        </p:nvSpPr>
-        <p:spPr>
-          <a:xfrm>
-            <a:off x="731520" y="3776472"/>
-            <a:ext cx="3383280" cy="182880"/>
-          </a:xfrm>
-          <a:prstGeom prst="rect">
-            <a:avLst/>
-          </a:prstGeom>
-          <a:noFill/>
-          <a:ln/>
-        </p:spPr>
-        <p:txBody>
-          <a:bodyPr wrap="square" lIns="0" tIns="0" rIns="0" bIns="0" rtlCol="0" anchor="ctr"/>
-          <a:lstStyle/>
-          <a:p>
-            <a:pPr marL="0" indent="0">
-              <a:buNone/>
-            </a:pPr>
+              <a:t>CRIT'AIR 2 requis en pratique (ZFE Lyon : CRIT'AIR 3 interdit dans le périmètre depuis le 01/01/2025, hors dérogation limitée)</a:t>
+            </a:r>
             <a:endParaRPr lang="en-US" sz="850" dirty="0"/>
           </a:p>
         </p:txBody>
@@ -14781,7 +13696,7 @@
             <a:r>
               <a:rPr lang="en-US" sz="1200" b="1" dirty="0">
                 <a:solidFill>
-                  <a:srgbClr val="1A202C"/>
+                  <a:srgbClr val="C53030"/>
                 </a:solidFill>
                 <a:latin typeface="Calibri" pitchFamily="34" charset="0"/>
                 <a:ea typeface="Calibri" pitchFamily="34" charset="-122"/>
@@ -14820,7 +13735,7 @@
             <a:r>
               <a:rPr lang="en-US" sz="900" b="1" dirty="0">
                 <a:solidFill>
-                  <a:srgbClr val="1A202C"/>
+                  <a:srgbClr val="C53030"/>
                 </a:solidFill>
                 <a:latin typeface="Calibri" pitchFamily="34" charset="0"/>
                 <a:ea typeface="Calibri" pitchFamily="34" charset="-122"/>
@@ -14856,13 +13771,31 @@
             <a:r>
               <a:rPr lang="en-US" sz="900" b="1" dirty="0">
                 <a:solidFill>
+                  <a:srgbClr val="C53030"/>
+                </a:solidFill>
+                <a:latin typeface="Calibri" pitchFamily="34" charset="0"/>
+                <a:ea typeface="Calibri" pitchFamily="34" charset="-122"/>
+                <a:cs typeface="Calibri" pitchFamily="34" charset="-120"/>
+              </a:rPr>
+              <a:t>🚫 Covering publicitaire :
+</a:t>
+            </a:r>
+            <a:endParaRPr lang="en-US" sz="900" dirty="0"/>
+          </a:p>
+          <a:p>
+            <a:pPr marL="0" indent="0">
+              <a:buNone/>
+            </a:pPr>
+            <a:r>
+              <a:rPr lang="en-US" sz="800" dirty="0">
+                <a:solidFill>
                   <a:srgbClr val="1A202C"/>
                 </a:solidFill>
                 <a:latin typeface="Calibri" pitchFamily="34" charset="0"/>
                 <a:ea typeface="Calibri" pitchFamily="34" charset="-122"/>
                 <a:cs typeface="Calibri" pitchFamily="34" charset="-120"/>
               </a:rPr>
-              <a:t>ℹ️ Covering :
+              <a:t>Interdit sans autorisation écrite du Service Taxis Métropole. Demande avec photo montage du projet.
 </a:t>
             </a:r>
             <a:endParaRPr lang="en-US" sz="900" dirty="0"/>
@@ -14880,7 +13813,7 @@
                 <a:ea typeface="Calibri" pitchFamily="34" charset="-122"/>
                 <a:cs typeface="Calibri" pitchFamily="34" charset="-120"/>
               </a:rPr>
-              <a:t>Le covering ne modifiant pas l'aspect du véhicule est autorisé. (Art. 7 — Arrêté du 27/11/2024)
+              <a:t>Covering : grille tarifaire lisible, visibilité vitrages non gênée.
 </a:t>
             </a:r>
             <a:endParaRPr lang="en-US" sz="900" dirty="0"/>
@@ -14890,27 +13823,9 @@
               <a:buNone/>
             </a:pPr>
             <a:r>
-              <a:rPr lang="en-US" sz="800" dirty="0">
-                <a:solidFill>
-                  <a:srgbClr val="1A202C"/>
-                </a:solidFill>
-                <a:latin typeface="Calibri" pitchFamily="34" charset="0"/>
-                <a:ea typeface="Calibri" pitchFamily="34" charset="-122"/>
-                <a:cs typeface="Calibri" pitchFamily="34" charset="-120"/>
-              </a:rPr>
-              <a:t>Le covering ne doit pas empêcher la lecture de la grille tarifaire ni contrarier la visibilité des surfaces vitrées.
-</a:t>
-            </a:r>
-            <a:endParaRPr lang="en-US" sz="900" dirty="0"/>
-          </a:p>
-          <a:p>
-            <a:pPr marL="0" indent="0">
-              <a:buNone/>
-            </a:pPr>
-            <a:r>
               <a:rPr lang="en-US" sz="900" b="1" dirty="0">
                 <a:solidFill>
-                  <a:srgbClr val="1A202C"/>
+                  <a:srgbClr val="276749"/>
                 </a:solidFill>
                 <a:latin typeface="Calibri" pitchFamily="34" charset="0"/>
                 <a:ea typeface="Calibri" pitchFamily="34" charset="-122"/>
@@ -14948,7 +13863,7 @@
             <a:avLst/>
           </a:prstGeom>
           <a:solidFill>
-            <a:srgbClr val="F2F2F2"/>
+            <a:srgbClr val="1E2A3A"/>
           </a:solidFill>
           <a:ln/>
         </p:spPr>
@@ -15026,7 +13941,7 @@
             <a:r>
               <a:rPr lang="en-US" sz="800" b="1" dirty="0">
                 <a:solidFill>
-                  <a:srgbClr val="1A202C"/>
+                  <a:srgbClr val="FFFFFF"/>
                 </a:solidFill>
                 <a:latin typeface="Calibri" pitchFamily="34" charset="0"/>
                 <a:ea typeface="Calibri" pitchFamily="34" charset="-122"/>
@@ -15035,57 +13950,6 @@
               <a:t>9</a:t>
             </a:r>
             <a:endParaRPr lang="en-US" sz="800" dirty="0"/>
-          </a:p>
-        </p:txBody>
-      </p:sp>
-      <p:sp>
-        <p:nvSpPr>
-          <p:cNvPr id="27" name="Rectangle 26"/>
-          <p:cNvSpPr/>
-          <p:nvPr/>
-        </p:nvSpPr>
-        <p:spPr>
-          <a:xfrm>
-            <a:off x="0" y="0"/>
-            <a:ext cx="9144000" cy="251999"/>
-          </a:xfrm>
-          <a:prstGeom prst="rect">
-            <a:avLst/>
-          </a:prstGeom>
-          <a:solidFill>
-            <a:srgbClr val="F2F2F2"/>
-          </a:solidFill>
-          <a:ln>
-            <a:noFill/>
-          </a:ln>
-        </p:spPr>
-        <p:style>
-          <a:lnRef idx="1">
-            <a:schemeClr val="accent1"/>
-          </a:lnRef>
-          <a:fillRef idx="3">
-            <a:schemeClr val="accent1"/>
-          </a:fillRef>
-          <a:effectRef idx="2">
-            <a:schemeClr val="accent1"/>
-          </a:effectRef>
-          <a:fontRef idx="minor">
-            <a:schemeClr val="lt1"/>
-          </a:fontRef>
-        </p:style>
-        <p:txBody>
-          <a:bodyPr wrap="square" rtlCol="0" anchor="ctr"/>
-          <a:lstStyle/>
-          <a:p>
-            <a:pPr algn="ctr"/>
-            <a:r>
-              <a:rPr sz="1000" b="1">
-                <a:solidFill>
-                  <a:srgbClr val="1A202C"/>
-                </a:solidFill>
-              </a:rPr>
-              <a:t>ÉPREUVE RÉGLEMENTATION LOCALE — Partie 2 sur 3</a:t>
-            </a:r>
           </a:p>
         </p:txBody>
       </p:sp>
